--- a/Mapped Curriculum Lessons/Grade 6/Lesson 06 - Logical Choices/Logical Choices - Slides.pptx
+++ b/Mapped Curriculum Lessons/Grade 6/Lesson 06 - Logical Choices/Logical Choices - Slides.pptx
@@ -2,28 +2,28 @@
 <file path=ppt/presentation.xml><?xml version="1.0" encoding="utf-8"?>
 <p:presentation xmlns:p="http://schemas.openxmlformats.org/presentationml/2006/main" embedTrueTypeFonts="1" saveSubsetFonts="0">
   <p:sldMasterIdLst>
-    <p:sldMasterId xmlns:r="http://schemas.openxmlformats.org/officeDocument/2006/relationships" id="2147483648" r:id="Rd6e5d9f7c207434d"/>
+    <p:sldMasterId xmlns:r="http://schemas.openxmlformats.org/officeDocument/2006/relationships" id="2147483648" r:id="R845388cdb57e41e2"/>
   </p:sldMasterIdLst>
   <p:notesMasterIdLst>
-    <p:notesMasterId xmlns:r="http://schemas.openxmlformats.org/officeDocument/2006/relationships" r:id="R4c9e853be7644f04"/>
+    <p:notesMasterId xmlns:r="http://schemas.openxmlformats.org/officeDocument/2006/relationships" r:id="R2c7f0e6e27ff4414"/>
   </p:notesMasterIdLst>
   <p:sldIdLst>
-    <p:sldId xmlns:r="http://schemas.openxmlformats.org/officeDocument/2006/relationships" id="256" r:id="R178a0a0317b34ead"/>
-    <p:sldId xmlns:r="http://schemas.openxmlformats.org/officeDocument/2006/relationships" id="257" r:id="R8310b835900640ca"/>
-    <p:sldId xmlns:r="http://schemas.openxmlformats.org/officeDocument/2006/relationships" id="258" r:id="R1299cac365d6422c"/>
-    <p:sldId xmlns:r="http://schemas.openxmlformats.org/officeDocument/2006/relationships" id="259" r:id="R7de766750b2c48cd"/>
-    <p:sldId xmlns:r="http://schemas.openxmlformats.org/officeDocument/2006/relationships" id="260" r:id="R8b21728ed18b4168"/>
-    <p:sldId xmlns:r="http://schemas.openxmlformats.org/officeDocument/2006/relationships" id="261" r:id="R1abc0edd65dd4da8"/>
-    <p:sldId xmlns:r="http://schemas.openxmlformats.org/officeDocument/2006/relationships" id="262" r:id="R97231609a6ae4943"/>
-    <p:sldId xmlns:r="http://schemas.openxmlformats.org/officeDocument/2006/relationships" id="263" r:id="R739a67fb664c4a89"/>
-    <p:sldId xmlns:r="http://schemas.openxmlformats.org/officeDocument/2006/relationships" id="264" r:id="R9c2e0687dffd49ae"/>
+    <p:sldId xmlns:r="http://schemas.openxmlformats.org/officeDocument/2006/relationships" id="256" r:id="Rc7e24236e4ea4281"/>
+    <p:sldId xmlns:r="http://schemas.openxmlformats.org/officeDocument/2006/relationships" id="257" r:id="Ra267b677bca94385"/>
+    <p:sldId xmlns:r="http://schemas.openxmlformats.org/officeDocument/2006/relationships" id="258" r:id="R65ff0b4449514412"/>
+    <p:sldId xmlns:r="http://schemas.openxmlformats.org/officeDocument/2006/relationships" id="259" r:id="Re4db280ace1d4d20"/>
+    <p:sldId xmlns:r="http://schemas.openxmlformats.org/officeDocument/2006/relationships" id="260" r:id="R7e246ac558724e26"/>
+    <p:sldId xmlns:r="http://schemas.openxmlformats.org/officeDocument/2006/relationships" id="261" r:id="Rc46c8a5080ec494e"/>
+    <p:sldId xmlns:r="http://schemas.openxmlformats.org/officeDocument/2006/relationships" id="262" r:id="R554a2e522b564f20"/>
+    <p:sldId xmlns:r="http://schemas.openxmlformats.org/officeDocument/2006/relationships" id="263" r:id="R2491487714a24c89"/>
+    <p:sldId xmlns:r="http://schemas.openxmlformats.org/officeDocument/2006/relationships" id="264" r:id="R398802ee65a14ae5"/>
   </p:sldIdLst>
   <p:sldSz cx="12192000" cy="6858000"/>
   <p:notesSz cx="6858000" cy="9144000"/>
   <p:embeddedFontLst>
     <p:embeddedFont>
       <p:font typeface="JetBrains Mono"/>
-      <p:regular xmlns:r="http://schemas.openxmlformats.org/officeDocument/2006/relationships" r:id="R1bb2109ea91541f7"/>
+      <p:regular xmlns:r="http://schemas.openxmlformats.org/officeDocument/2006/relationships" r:id="R51d3c30cb1f24230"/>
     </p:embeddedFont>
   </p:embeddedFontLst>
 </p:presentation>
@@ -1071,7 +1071,7 @@
           <p:nvPr/>
         </p:nvPicPr>
         <p:blipFill rotWithShape="1">
-          <a:blip xmlns:r="http://schemas.openxmlformats.org/officeDocument/2006/relationships" xmlns:a="http://schemas.openxmlformats.org/drawingml/2006/main" r:embed="R82a800c43fd44c5d"/>
+          <a:blip xmlns:r="http://schemas.openxmlformats.org/officeDocument/2006/relationships" xmlns:a="http://schemas.openxmlformats.org/drawingml/2006/main" r:embed="R0c3dc0f8b888457d"/>
           <a:stretch xmlns:a="http://schemas.openxmlformats.org/drawingml/2006/main"/>
         </p:blipFill>
         <p:spPr>
@@ -1451,7 +1451,7 @@
           <p:nvPr/>
         </p:nvPicPr>
         <p:blipFill rotWithShape="1">
-          <a:blip xmlns:r="http://schemas.openxmlformats.org/officeDocument/2006/relationships" xmlns:a="http://schemas.openxmlformats.org/drawingml/2006/main" r:embed="R929ffb17dd9d4a77">
+          <a:blip xmlns:r="http://schemas.openxmlformats.org/officeDocument/2006/relationships" xmlns:a="http://schemas.openxmlformats.org/drawingml/2006/main" r:embed="Rd2f57ee6ad51467e">
             <a:alphaModFix amt="28000"/>
           </a:blip>
           <a:stretch xmlns:a="http://schemas.openxmlformats.org/drawingml/2006/main"/>
@@ -1664,7 +1664,7 @@
           <p:nvPr/>
         </p:nvPicPr>
         <p:blipFill rotWithShape="1">
-          <a:blip xmlns:r="http://schemas.openxmlformats.org/officeDocument/2006/relationships" xmlns:a="http://schemas.openxmlformats.org/drawingml/2006/main" r:embed="Re2f0d62badfe40e8">
+          <a:blip xmlns:r="http://schemas.openxmlformats.org/officeDocument/2006/relationships" xmlns:a="http://schemas.openxmlformats.org/drawingml/2006/main" r:embed="R3ea7e3de535a4bb0">
             <a:alphaModFix amt="28000"/>
           </a:blip>
           <a:stretch xmlns:a="http://schemas.openxmlformats.org/drawingml/2006/main"/>
@@ -1899,7 +1899,7 @@
           <p:nvPr/>
         </p:nvPicPr>
         <p:blipFill rotWithShape="1">
-          <a:blip xmlns:r="http://schemas.openxmlformats.org/officeDocument/2006/relationships" xmlns:a="http://schemas.openxmlformats.org/drawingml/2006/main" r:embed="R7147e7e1564c4cec">
+          <a:blip xmlns:r="http://schemas.openxmlformats.org/officeDocument/2006/relationships" xmlns:a="http://schemas.openxmlformats.org/drawingml/2006/main" r:embed="Rbe010588f1f848e4">
             <a:alphaModFix amt="28000"/>
           </a:blip>
           <a:stretch xmlns:a="http://schemas.openxmlformats.org/drawingml/2006/main"/>
@@ -2176,7 +2176,7 @@
           <p:nvPr/>
         </p:nvPicPr>
         <p:blipFill rotWithShape="1">
-          <a:blip xmlns:r="http://schemas.openxmlformats.org/officeDocument/2006/relationships" xmlns:a="http://schemas.openxmlformats.org/drawingml/2006/main" r:embed="Ra40ef56200914146">
+          <a:blip xmlns:r="http://schemas.openxmlformats.org/officeDocument/2006/relationships" xmlns:a="http://schemas.openxmlformats.org/drawingml/2006/main" r:embed="Rb93770bf7047479a">
             <a:alphaModFix amt="28000"/>
           </a:blip>
           <a:stretch xmlns:a="http://schemas.openxmlformats.org/drawingml/2006/main"/>
@@ -2451,7 +2451,7 @@
           <p:nvPr/>
         </p:nvPicPr>
         <p:blipFill rotWithShape="1">
-          <a:blip xmlns:r="http://schemas.openxmlformats.org/officeDocument/2006/relationships" xmlns:a="http://schemas.openxmlformats.org/drawingml/2006/main" r:embed="Re016d9b537fe4d3e">
+          <a:blip xmlns:r="http://schemas.openxmlformats.org/officeDocument/2006/relationships" xmlns:a="http://schemas.openxmlformats.org/drawingml/2006/main" r:embed="Re3dce3af5c2045ac">
             <a:alphaModFix amt="28000"/>
           </a:blip>
           <a:stretch xmlns:a="http://schemas.openxmlformats.org/drawingml/2006/main"/>
@@ -2875,7 +2875,7 @@
           <p:nvPr/>
         </p:nvPicPr>
         <p:blipFill rotWithShape="1">
-          <a:blip xmlns:r="http://schemas.openxmlformats.org/officeDocument/2006/relationships" xmlns:a="http://schemas.openxmlformats.org/drawingml/2006/main" r:embed="R727047e74d244b0a">
+          <a:blip xmlns:r="http://schemas.openxmlformats.org/officeDocument/2006/relationships" xmlns:a="http://schemas.openxmlformats.org/drawingml/2006/main" r:embed="R4c44f606236f4a45">
             <a:alphaModFix amt="28000"/>
           </a:blip>
           <a:stretch xmlns:a="http://schemas.openxmlformats.org/drawingml/2006/main"/>
@@ -3016,7 +3016,7 @@
           <p:nvPr/>
         </p:nvPicPr>
         <p:blipFill rotWithShape="1">
-          <a:blip xmlns:r="http://schemas.openxmlformats.org/officeDocument/2006/relationships" xmlns:a="http://schemas.openxmlformats.org/drawingml/2006/main" r:embed="R4e831f31bb994f9a">
+          <a:blip xmlns:r="http://schemas.openxmlformats.org/officeDocument/2006/relationships" xmlns:a="http://schemas.openxmlformats.org/drawingml/2006/main" r:embed="Ra9a0df1295ce4f5a">
             <a:alphaModFix amt="28000"/>
           </a:blip>
           <a:stretch xmlns:a="http://schemas.openxmlformats.org/drawingml/2006/main"/>
@@ -3130,7 +3130,7 @@
           <p:nvPr/>
         </p:nvPicPr>
         <p:blipFill rotWithShape="1">
-          <a:blip xmlns:r="http://schemas.openxmlformats.org/officeDocument/2006/relationships" xmlns:a="http://schemas.openxmlformats.org/drawingml/2006/main" r:embed="R6fdbaed9b8f64d14">
+          <a:blip xmlns:r="http://schemas.openxmlformats.org/officeDocument/2006/relationships" xmlns:a="http://schemas.openxmlformats.org/drawingml/2006/main" r:embed="R718b43eed1654fd8">
             <a:alphaModFix amt="28000"/>
           </a:blip>
           <a:stretch xmlns:a="http://schemas.openxmlformats.org/drawingml/2006/main"/>
@@ -3457,7 +3457,7 @@
           <p:nvPr/>
         </p:nvPicPr>
         <p:blipFill rotWithShape="1">
-          <a:blip xmlns:r="http://schemas.openxmlformats.org/officeDocument/2006/relationships" xmlns:a="http://schemas.openxmlformats.org/drawingml/2006/main" r:embed="Ra48b8cecaa32499a">
+          <a:blip xmlns:r="http://schemas.openxmlformats.org/officeDocument/2006/relationships" xmlns:a="http://schemas.openxmlformats.org/drawingml/2006/main" r:embed="R899bf92b62bd4da6">
             <a:alphaModFix amt="28000"/>
           </a:blip>
           <a:stretch xmlns:a="http://schemas.openxmlformats.org/drawingml/2006/main"/>
@@ -3745,7 +3745,7 @@
           <p:nvPr/>
         </p:nvPicPr>
         <p:blipFill rotWithShape="1">
-          <a:blip xmlns:r="http://schemas.openxmlformats.org/officeDocument/2006/relationships" xmlns:a="http://schemas.openxmlformats.org/drawingml/2006/main" r:embed="R5656ae9429024d6a">
+          <a:blip xmlns:r="http://schemas.openxmlformats.org/officeDocument/2006/relationships" xmlns:a="http://schemas.openxmlformats.org/drawingml/2006/main" r:embed="Re09ed2caaced49a5">
             <a:alphaModFix amt="28000"/>
           </a:blip>
           <a:stretch xmlns:a="http://schemas.openxmlformats.org/drawingml/2006/main"/>
@@ -3982,17 +3982,17 @@
   </p:cSld>
   <p:clrMap bg1="lt1" tx1="dk1" bg2="lt2" tx2="dk2" accent1="accent1" accent2="accent2" accent3="accent3" accent4="accent4" accent5="accent5" accent6="accent6" hlink="hlink" folHlink="folHlink"/>
   <p:sldLayoutIdLst>
-    <p:sldLayoutId xmlns:r="http://schemas.openxmlformats.org/officeDocument/2006/relationships" id="2147483649" r:id="Rbbc03f8e305d4db2"/>
-    <p:sldLayoutId xmlns:r="http://schemas.openxmlformats.org/officeDocument/2006/relationships" id="2147483650" r:id="R6d1e86d448724974"/>
-    <p:sldLayoutId xmlns:r="http://schemas.openxmlformats.org/officeDocument/2006/relationships" id="2147483651" r:id="R955992956fcd4f14"/>
-    <p:sldLayoutId xmlns:r="http://schemas.openxmlformats.org/officeDocument/2006/relationships" id="2147483652" r:id="Rfaef57ac4be04ff7"/>
-    <p:sldLayoutId xmlns:r="http://schemas.openxmlformats.org/officeDocument/2006/relationships" id="2147483653" r:id="R1492cf8d1a464ffa"/>
-    <p:sldLayoutId xmlns:r="http://schemas.openxmlformats.org/officeDocument/2006/relationships" id="2147483654" r:id="Rd9b7b645cf604ab0"/>
-    <p:sldLayoutId xmlns:r="http://schemas.openxmlformats.org/officeDocument/2006/relationships" id="2147483655" r:id="Rb90a41ee35c441e7"/>
-    <p:sldLayoutId xmlns:r="http://schemas.openxmlformats.org/officeDocument/2006/relationships" id="2147483656" r:id="Rada3c025709b49ab"/>
-    <p:sldLayoutId xmlns:r="http://schemas.openxmlformats.org/officeDocument/2006/relationships" id="2147483657" r:id="Rd59ee703accf4d5a"/>
-    <p:sldLayoutId xmlns:r="http://schemas.openxmlformats.org/officeDocument/2006/relationships" id="2147483658" r:id="R540de58b923940ca"/>
-    <p:sldLayoutId xmlns:r="http://schemas.openxmlformats.org/officeDocument/2006/relationships" id="2147483659" r:id="Rffbf22e5bb734d64"/>
+    <p:sldLayoutId xmlns:r="http://schemas.openxmlformats.org/officeDocument/2006/relationships" id="2147483649" r:id="R3cbffb0924c84cdf"/>
+    <p:sldLayoutId xmlns:r="http://schemas.openxmlformats.org/officeDocument/2006/relationships" id="2147483650" r:id="Rbb8130956a844790"/>
+    <p:sldLayoutId xmlns:r="http://schemas.openxmlformats.org/officeDocument/2006/relationships" id="2147483651" r:id="Rb64114330a45474d"/>
+    <p:sldLayoutId xmlns:r="http://schemas.openxmlformats.org/officeDocument/2006/relationships" id="2147483652" r:id="R93b8bebac7d9439b"/>
+    <p:sldLayoutId xmlns:r="http://schemas.openxmlformats.org/officeDocument/2006/relationships" id="2147483653" r:id="R6426e8ddded44e83"/>
+    <p:sldLayoutId xmlns:r="http://schemas.openxmlformats.org/officeDocument/2006/relationships" id="2147483654" r:id="Rba03e88435164d61"/>
+    <p:sldLayoutId xmlns:r="http://schemas.openxmlformats.org/officeDocument/2006/relationships" id="2147483655" r:id="R22d6e8f971a24aba"/>
+    <p:sldLayoutId xmlns:r="http://schemas.openxmlformats.org/officeDocument/2006/relationships" id="2147483656" r:id="Re65b8c7c320d4d74"/>
+    <p:sldLayoutId xmlns:r="http://schemas.openxmlformats.org/officeDocument/2006/relationships" id="2147483657" r:id="R924ff6cbbec74b82"/>
+    <p:sldLayoutId xmlns:r="http://schemas.openxmlformats.org/officeDocument/2006/relationships" id="2147483658" r:id="R7504d93ce43a4dd8"/>
+    <p:sldLayoutId xmlns:r="http://schemas.openxmlformats.org/officeDocument/2006/relationships" id="2147483659" r:id="R67b352c1cc5a4c97"/>
   </p:sldLayoutIdLst>
   <p:hf hdr="0" ftr="0" dt="0"/>
   <p:txStyles>

--- a/Mapped Curriculum Lessons/Grade 6/Lesson 06 - Logical Choices/Logical Choices - Slides.pptx
+++ b/Mapped Curriculum Lessons/Grade 6/Lesson 06 - Logical Choices/Logical Choices - Slides.pptx
@@ -2,28 +2,28 @@
 <file path=ppt/presentation.xml><?xml version="1.0" encoding="utf-8"?>
 <p:presentation xmlns:p="http://schemas.openxmlformats.org/presentationml/2006/main" embedTrueTypeFonts="1" saveSubsetFonts="0">
   <p:sldMasterIdLst>
-    <p:sldMasterId xmlns:r="http://schemas.openxmlformats.org/officeDocument/2006/relationships" id="2147483648" r:id="R845388cdb57e41e2"/>
+    <p:sldMasterId xmlns:r="http://schemas.openxmlformats.org/officeDocument/2006/relationships" id="2147483648" r:id="Rf86939b95e104cd7"/>
   </p:sldMasterIdLst>
   <p:notesMasterIdLst>
-    <p:notesMasterId xmlns:r="http://schemas.openxmlformats.org/officeDocument/2006/relationships" r:id="R2c7f0e6e27ff4414"/>
+    <p:notesMasterId xmlns:r="http://schemas.openxmlformats.org/officeDocument/2006/relationships" r:id="Rbdfee60d81064ee7"/>
   </p:notesMasterIdLst>
   <p:sldIdLst>
-    <p:sldId xmlns:r="http://schemas.openxmlformats.org/officeDocument/2006/relationships" id="256" r:id="Rc7e24236e4ea4281"/>
-    <p:sldId xmlns:r="http://schemas.openxmlformats.org/officeDocument/2006/relationships" id="257" r:id="Ra267b677bca94385"/>
-    <p:sldId xmlns:r="http://schemas.openxmlformats.org/officeDocument/2006/relationships" id="258" r:id="R65ff0b4449514412"/>
-    <p:sldId xmlns:r="http://schemas.openxmlformats.org/officeDocument/2006/relationships" id="259" r:id="Re4db280ace1d4d20"/>
-    <p:sldId xmlns:r="http://schemas.openxmlformats.org/officeDocument/2006/relationships" id="260" r:id="R7e246ac558724e26"/>
-    <p:sldId xmlns:r="http://schemas.openxmlformats.org/officeDocument/2006/relationships" id="261" r:id="Rc46c8a5080ec494e"/>
-    <p:sldId xmlns:r="http://schemas.openxmlformats.org/officeDocument/2006/relationships" id="262" r:id="R554a2e522b564f20"/>
-    <p:sldId xmlns:r="http://schemas.openxmlformats.org/officeDocument/2006/relationships" id="263" r:id="R2491487714a24c89"/>
-    <p:sldId xmlns:r="http://schemas.openxmlformats.org/officeDocument/2006/relationships" id="264" r:id="R398802ee65a14ae5"/>
+    <p:sldId xmlns:r="http://schemas.openxmlformats.org/officeDocument/2006/relationships" id="256" r:id="R9951eb4ab5a44c75"/>
+    <p:sldId xmlns:r="http://schemas.openxmlformats.org/officeDocument/2006/relationships" id="257" r:id="R791bbb8dc9334d3e"/>
+    <p:sldId xmlns:r="http://schemas.openxmlformats.org/officeDocument/2006/relationships" id="258" r:id="Rcbefde46f3f6414e"/>
+    <p:sldId xmlns:r="http://schemas.openxmlformats.org/officeDocument/2006/relationships" id="259" r:id="R8645d1fbbd39449b"/>
+    <p:sldId xmlns:r="http://schemas.openxmlformats.org/officeDocument/2006/relationships" id="260" r:id="R49d5f225dc0644d2"/>
+    <p:sldId xmlns:r="http://schemas.openxmlformats.org/officeDocument/2006/relationships" id="261" r:id="Ree3eb617a2bb487b"/>
+    <p:sldId xmlns:r="http://schemas.openxmlformats.org/officeDocument/2006/relationships" id="262" r:id="R04dbdb57ff584fbb"/>
+    <p:sldId xmlns:r="http://schemas.openxmlformats.org/officeDocument/2006/relationships" id="263" r:id="R289d8db58e9744df"/>
+    <p:sldId xmlns:r="http://schemas.openxmlformats.org/officeDocument/2006/relationships" id="264" r:id="R6d13a2eb0b1b48af"/>
   </p:sldIdLst>
   <p:sldSz cx="12192000" cy="6858000"/>
   <p:notesSz cx="6858000" cy="9144000"/>
   <p:embeddedFontLst>
     <p:embeddedFont>
       <p:font typeface="JetBrains Mono"/>
-      <p:regular xmlns:r="http://schemas.openxmlformats.org/officeDocument/2006/relationships" r:id="R51d3c30cb1f24230"/>
+      <p:regular xmlns:r="http://schemas.openxmlformats.org/officeDocument/2006/relationships" r:id="Rc1f1a0423d59430f"/>
     </p:embeddedFont>
   </p:embeddedFontLst>
 </p:presentation>
@@ -1071,7 +1071,7 @@
           <p:nvPr/>
         </p:nvPicPr>
         <p:blipFill rotWithShape="1">
-          <a:blip xmlns:r="http://schemas.openxmlformats.org/officeDocument/2006/relationships" xmlns:a="http://schemas.openxmlformats.org/drawingml/2006/main" r:embed="R0c3dc0f8b888457d"/>
+          <a:blip xmlns:r="http://schemas.openxmlformats.org/officeDocument/2006/relationships" xmlns:a="http://schemas.openxmlformats.org/drawingml/2006/main" r:embed="R6a387bbd6a174931"/>
           <a:stretch xmlns:a="http://schemas.openxmlformats.org/drawingml/2006/main"/>
         </p:blipFill>
         <p:spPr>
@@ -1451,7 +1451,7 @@
           <p:nvPr/>
         </p:nvPicPr>
         <p:blipFill rotWithShape="1">
-          <a:blip xmlns:r="http://schemas.openxmlformats.org/officeDocument/2006/relationships" xmlns:a="http://schemas.openxmlformats.org/drawingml/2006/main" r:embed="Rd2f57ee6ad51467e">
+          <a:blip xmlns:r="http://schemas.openxmlformats.org/officeDocument/2006/relationships" xmlns:a="http://schemas.openxmlformats.org/drawingml/2006/main" r:embed="Reddaa3b7f6a042e7">
             <a:alphaModFix amt="28000"/>
           </a:blip>
           <a:stretch xmlns:a="http://schemas.openxmlformats.org/drawingml/2006/main"/>
@@ -1664,7 +1664,7 @@
           <p:nvPr/>
         </p:nvPicPr>
         <p:blipFill rotWithShape="1">
-          <a:blip xmlns:r="http://schemas.openxmlformats.org/officeDocument/2006/relationships" xmlns:a="http://schemas.openxmlformats.org/drawingml/2006/main" r:embed="R3ea7e3de535a4bb0">
+          <a:blip xmlns:r="http://schemas.openxmlformats.org/officeDocument/2006/relationships" xmlns:a="http://schemas.openxmlformats.org/drawingml/2006/main" r:embed="Rca8aaea1142541ce">
             <a:alphaModFix amt="28000"/>
           </a:blip>
           <a:stretch xmlns:a="http://schemas.openxmlformats.org/drawingml/2006/main"/>
@@ -1899,7 +1899,7 @@
           <p:nvPr/>
         </p:nvPicPr>
         <p:blipFill rotWithShape="1">
-          <a:blip xmlns:r="http://schemas.openxmlformats.org/officeDocument/2006/relationships" xmlns:a="http://schemas.openxmlformats.org/drawingml/2006/main" r:embed="Rbe010588f1f848e4">
+          <a:blip xmlns:r="http://schemas.openxmlformats.org/officeDocument/2006/relationships" xmlns:a="http://schemas.openxmlformats.org/drawingml/2006/main" r:embed="R450caab494a04138">
             <a:alphaModFix amt="28000"/>
           </a:blip>
           <a:stretch xmlns:a="http://schemas.openxmlformats.org/drawingml/2006/main"/>
@@ -2176,7 +2176,7 @@
           <p:nvPr/>
         </p:nvPicPr>
         <p:blipFill rotWithShape="1">
-          <a:blip xmlns:r="http://schemas.openxmlformats.org/officeDocument/2006/relationships" xmlns:a="http://schemas.openxmlformats.org/drawingml/2006/main" r:embed="Rb93770bf7047479a">
+          <a:blip xmlns:r="http://schemas.openxmlformats.org/officeDocument/2006/relationships" xmlns:a="http://schemas.openxmlformats.org/drawingml/2006/main" r:embed="Rf05a307475b54f46">
             <a:alphaModFix amt="28000"/>
           </a:blip>
           <a:stretch xmlns:a="http://schemas.openxmlformats.org/drawingml/2006/main"/>
@@ -2451,7 +2451,7 @@
           <p:nvPr/>
         </p:nvPicPr>
         <p:blipFill rotWithShape="1">
-          <a:blip xmlns:r="http://schemas.openxmlformats.org/officeDocument/2006/relationships" xmlns:a="http://schemas.openxmlformats.org/drawingml/2006/main" r:embed="Re3dce3af5c2045ac">
+          <a:blip xmlns:r="http://schemas.openxmlformats.org/officeDocument/2006/relationships" xmlns:a="http://schemas.openxmlformats.org/drawingml/2006/main" r:embed="R39ed3b7f24ae4aaa">
             <a:alphaModFix amt="28000"/>
           </a:blip>
           <a:stretch xmlns:a="http://schemas.openxmlformats.org/drawingml/2006/main"/>
@@ -2875,7 +2875,7 @@
           <p:nvPr/>
         </p:nvPicPr>
         <p:blipFill rotWithShape="1">
-          <a:blip xmlns:r="http://schemas.openxmlformats.org/officeDocument/2006/relationships" xmlns:a="http://schemas.openxmlformats.org/drawingml/2006/main" r:embed="R4c44f606236f4a45">
+          <a:blip xmlns:r="http://schemas.openxmlformats.org/officeDocument/2006/relationships" xmlns:a="http://schemas.openxmlformats.org/drawingml/2006/main" r:embed="R7a0a5e480fcc470c">
             <a:alphaModFix amt="28000"/>
           </a:blip>
           <a:stretch xmlns:a="http://schemas.openxmlformats.org/drawingml/2006/main"/>
@@ -3016,7 +3016,7 @@
           <p:nvPr/>
         </p:nvPicPr>
         <p:blipFill rotWithShape="1">
-          <a:blip xmlns:r="http://schemas.openxmlformats.org/officeDocument/2006/relationships" xmlns:a="http://schemas.openxmlformats.org/drawingml/2006/main" r:embed="Ra9a0df1295ce4f5a">
+          <a:blip xmlns:r="http://schemas.openxmlformats.org/officeDocument/2006/relationships" xmlns:a="http://schemas.openxmlformats.org/drawingml/2006/main" r:embed="R333eb9617c054e06">
             <a:alphaModFix amt="28000"/>
           </a:blip>
           <a:stretch xmlns:a="http://schemas.openxmlformats.org/drawingml/2006/main"/>
@@ -3130,7 +3130,7 @@
           <p:nvPr/>
         </p:nvPicPr>
         <p:blipFill rotWithShape="1">
-          <a:blip xmlns:r="http://schemas.openxmlformats.org/officeDocument/2006/relationships" xmlns:a="http://schemas.openxmlformats.org/drawingml/2006/main" r:embed="R718b43eed1654fd8">
+          <a:blip xmlns:r="http://schemas.openxmlformats.org/officeDocument/2006/relationships" xmlns:a="http://schemas.openxmlformats.org/drawingml/2006/main" r:embed="R7a31a42780fb49a5">
             <a:alphaModFix amt="28000"/>
           </a:blip>
           <a:stretch xmlns:a="http://schemas.openxmlformats.org/drawingml/2006/main"/>
@@ -3457,7 +3457,7 @@
           <p:nvPr/>
         </p:nvPicPr>
         <p:blipFill rotWithShape="1">
-          <a:blip xmlns:r="http://schemas.openxmlformats.org/officeDocument/2006/relationships" xmlns:a="http://schemas.openxmlformats.org/drawingml/2006/main" r:embed="R899bf92b62bd4da6">
+          <a:blip xmlns:r="http://schemas.openxmlformats.org/officeDocument/2006/relationships" xmlns:a="http://schemas.openxmlformats.org/drawingml/2006/main" r:embed="R032bda891a3d405b">
             <a:alphaModFix amt="28000"/>
           </a:blip>
           <a:stretch xmlns:a="http://schemas.openxmlformats.org/drawingml/2006/main"/>
@@ -3745,7 +3745,7 @@
           <p:nvPr/>
         </p:nvPicPr>
         <p:blipFill rotWithShape="1">
-          <a:blip xmlns:r="http://schemas.openxmlformats.org/officeDocument/2006/relationships" xmlns:a="http://schemas.openxmlformats.org/drawingml/2006/main" r:embed="Re09ed2caaced49a5">
+          <a:blip xmlns:r="http://schemas.openxmlformats.org/officeDocument/2006/relationships" xmlns:a="http://schemas.openxmlformats.org/drawingml/2006/main" r:embed="R75a7b2d6167b424a">
             <a:alphaModFix amt="28000"/>
           </a:blip>
           <a:stretch xmlns:a="http://schemas.openxmlformats.org/drawingml/2006/main"/>
@@ -3982,17 +3982,17 @@
   </p:cSld>
   <p:clrMap bg1="lt1" tx1="dk1" bg2="lt2" tx2="dk2" accent1="accent1" accent2="accent2" accent3="accent3" accent4="accent4" accent5="accent5" accent6="accent6" hlink="hlink" folHlink="folHlink"/>
   <p:sldLayoutIdLst>
-    <p:sldLayoutId xmlns:r="http://schemas.openxmlformats.org/officeDocument/2006/relationships" id="2147483649" r:id="R3cbffb0924c84cdf"/>
-    <p:sldLayoutId xmlns:r="http://schemas.openxmlformats.org/officeDocument/2006/relationships" id="2147483650" r:id="Rbb8130956a844790"/>
-    <p:sldLayoutId xmlns:r="http://schemas.openxmlformats.org/officeDocument/2006/relationships" id="2147483651" r:id="Rb64114330a45474d"/>
-    <p:sldLayoutId xmlns:r="http://schemas.openxmlformats.org/officeDocument/2006/relationships" id="2147483652" r:id="R93b8bebac7d9439b"/>
-    <p:sldLayoutId xmlns:r="http://schemas.openxmlformats.org/officeDocument/2006/relationships" id="2147483653" r:id="R6426e8ddded44e83"/>
-    <p:sldLayoutId xmlns:r="http://schemas.openxmlformats.org/officeDocument/2006/relationships" id="2147483654" r:id="Rba03e88435164d61"/>
-    <p:sldLayoutId xmlns:r="http://schemas.openxmlformats.org/officeDocument/2006/relationships" id="2147483655" r:id="R22d6e8f971a24aba"/>
-    <p:sldLayoutId xmlns:r="http://schemas.openxmlformats.org/officeDocument/2006/relationships" id="2147483656" r:id="Re65b8c7c320d4d74"/>
-    <p:sldLayoutId xmlns:r="http://schemas.openxmlformats.org/officeDocument/2006/relationships" id="2147483657" r:id="R924ff6cbbec74b82"/>
-    <p:sldLayoutId xmlns:r="http://schemas.openxmlformats.org/officeDocument/2006/relationships" id="2147483658" r:id="R7504d93ce43a4dd8"/>
-    <p:sldLayoutId xmlns:r="http://schemas.openxmlformats.org/officeDocument/2006/relationships" id="2147483659" r:id="R67b352c1cc5a4c97"/>
+    <p:sldLayoutId xmlns:r="http://schemas.openxmlformats.org/officeDocument/2006/relationships" id="2147483649" r:id="Rc7acf63b611340cd"/>
+    <p:sldLayoutId xmlns:r="http://schemas.openxmlformats.org/officeDocument/2006/relationships" id="2147483650" r:id="R793759ddf74d47f8"/>
+    <p:sldLayoutId xmlns:r="http://schemas.openxmlformats.org/officeDocument/2006/relationships" id="2147483651" r:id="Rf257145d88b740b7"/>
+    <p:sldLayoutId xmlns:r="http://schemas.openxmlformats.org/officeDocument/2006/relationships" id="2147483652" r:id="Rafcfb7f844874c1f"/>
+    <p:sldLayoutId xmlns:r="http://schemas.openxmlformats.org/officeDocument/2006/relationships" id="2147483653" r:id="Rc1b8b2151f5148d8"/>
+    <p:sldLayoutId xmlns:r="http://schemas.openxmlformats.org/officeDocument/2006/relationships" id="2147483654" r:id="Re7701869fcb141cf"/>
+    <p:sldLayoutId xmlns:r="http://schemas.openxmlformats.org/officeDocument/2006/relationships" id="2147483655" r:id="Rb5b0993eb3f94152"/>
+    <p:sldLayoutId xmlns:r="http://schemas.openxmlformats.org/officeDocument/2006/relationships" id="2147483656" r:id="Re7a072f8ba9640f3"/>
+    <p:sldLayoutId xmlns:r="http://schemas.openxmlformats.org/officeDocument/2006/relationships" id="2147483657" r:id="R7e26961603f34c57"/>
+    <p:sldLayoutId xmlns:r="http://schemas.openxmlformats.org/officeDocument/2006/relationships" id="2147483658" r:id="R9c135640168443fa"/>
+    <p:sldLayoutId xmlns:r="http://schemas.openxmlformats.org/officeDocument/2006/relationships" id="2147483659" r:id="Ra002468f09b145a8"/>
   </p:sldLayoutIdLst>
   <p:hf hdr="0" ftr="0" dt="0"/>
   <p:txStyles>
@@ -9198,7 +9198,7 @@
         </p:spPr>
         <p:txBody>
           <a:bodyPr xmlns:a="http://schemas.openxmlformats.org/drawingml/2006/main">
-            <a:normAutofit fontScale="100000"/>
+            <a:normAutofit fontScale="94520"/>
           </a:bodyPr>
           <a:lstStyle xmlns:a="http://schemas.openxmlformats.org/drawingml/2006/main"/>
           <a:p xmlns:a="http://schemas.openxmlformats.org/drawingml/2006/main">
@@ -9217,7 +9217,194 @@
                 <a:ea typeface="Calibri"/>
                 <a:cs typeface="Calibri"/>
               </a:rPr>
-              <a:t>Add an adult exception with or: entry is allowed when the age-and-ticket rule is true or an adult is present. Test an under-age visitor with no ticket but with an adult.</a:t>
+              <a:t>Change the </a:t>
+            </a:r>
+            <a:r>
+              <a:rPr sz="2400" b="0">
+                <a:solidFill>
+                  <a:srgbClr val="1750EB"/>
+                </a:solidFill>
+                <a:latin typeface="JetBrains Mono"/>
+                <a:ea typeface="JetBrains Mono"/>
+                <a:cs typeface="JetBrains Mono"/>
+              </a:rPr>
+              <a:t>if</a:t>
+            </a:r>
+            <a:r>
+              <a:rPr sz="2400" b="0">
+                <a:solidFill>
+                  <a:srgbClr val="080808"/>
+                </a:solidFill>
+                <a:latin typeface="Calibri"/>
+                <a:ea typeface="Calibri"/>
+                <a:cs typeface="Calibri"/>
+              </a:rPr>
+              <a:t> condition. Use the </a:t>
+            </a:r>
+            <a:r>
+              <a:rPr sz="2400" b="0">
+                <a:solidFill>
+                  <a:srgbClr val="1750EB"/>
+                </a:solidFill>
+                <a:latin typeface="JetBrains Mono"/>
+                <a:ea typeface="JetBrains Mono"/>
+                <a:cs typeface="JetBrains Mono"/>
+              </a:rPr>
+              <a:t>and</a:t>
+            </a:r>
+            <a:r>
+              <a:rPr sz="2400" b="0">
+                <a:solidFill>
+                  <a:srgbClr val="080808"/>
+                </a:solidFill>
+                <a:latin typeface="Calibri"/>
+                <a:ea typeface="Calibri"/>
+                <a:cs typeface="Calibri"/>
+              </a:rPr>
+              <a:t> operator to allow entry when [age] is at least 12 and [has_ticket] is </a:t>
+            </a:r>
+            <a:r>
+              <a:rPr sz="2400" b="0">
+                <a:solidFill>
+                  <a:srgbClr val="067D17"/>
+                </a:solidFill>
+                <a:latin typeface="JetBrains Mono"/>
+                <a:ea typeface="JetBrains Mono"/>
+                <a:cs typeface="JetBrains Mono"/>
+              </a:rPr>
+              <a:t>"yes"</a:t>
+            </a:r>
+            <a:r>
+              <a:rPr sz="2400" b="0">
+                <a:solidFill>
+                  <a:srgbClr val="080808"/>
+                </a:solidFill>
+                <a:latin typeface="Calibri"/>
+                <a:ea typeface="Calibri"/>
+                <a:cs typeface="Calibri"/>
+              </a:rPr>
+              <a:t>. Use the </a:t>
+            </a:r>
+            <a:r>
+              <a:rPr sz="2400" b="0">
+                <a:solidFill>
+                  <a:srgbClr val="1750EB"/>
+                </a:solidFill>
+                <a:latin typeface="JetBrains Mono"/>
+                <a:ea typeface="JetBrains Mono"/>
+                <a:cs typeface="JetBrains Mono"/>
+              </a:rPr>
+              <a:t>or</a:t>
+            </a:r>
+            <a:r>
+              <a:rPr sz="2400" b="0">
+                <a:solidFill>
+                  <a:srgbClr val="080808"/>
+                </a:solidFill>
+                <a:latin typeface="Calibri"/>
+                <a:ea typeface="Calibri"/>
+                <a:cs typeface="Calibri"/>
+              </a:rPr>
+              <a:t> operator to also allow entry when [has_adult] is </a:t>
+            </a:r>
+            <a:r>
+              <a:rPr sz="2400" b="0">
+                <a:solidFill>
+                  <a:srgbClr val="067D17"/>
+                </a:solidFill>
+                <a:latin typeface="JetBrains Mono"/>
+                <a:ea typeface="JetBrains Mono"/>
+                <a:cs typeface="JetBrains Mono"/>
+              </a:rPr>
+              <a:t>"yes"</a:t>
+            </a:r>
+            <a:r>
+              <a:rPr sz="2400" b="0">
+                <a:solidFill>
+                  <a:srgbClr val="080808"/>
+                </a:solidFill>
+                <a:latin typeface="Calibri"/>
+                <a:ea typeface="Calibri"/>
+                <a:cs typeface="Calibri"/>
+              </a:rPr>
+              <a:t>. Otherwise, display </a:t>
+            </a:r>
+            <a:r>
+              <a:rPr sz="2400" b="0">
+                <a:solidFill>
+                  <a:srgbClr val="067D17"/>
+                </a:solidFill>
+                <a:latin typeface="JetBrains Mono"/>
+                <a:ea typeface="JetBrains Mono"/>
+                <a:cs typeface="JetBrains Mono"/>
+              </a:rPr>
+              <a:t>"Please check the entry rules."</a:t>
+            </a:r>
+            <a:r>
+              <a:rPr sz="2400" b="0">
+                <a:solidFill>
+                  <a:srgbClr val="080808"/>
+                </a:solidFill>
+                <a:latin typeface="Calibri"/>
+                <a:ea typeface="Calibri"/>
+                <a:cs typeface="Calibri"/>
+              </a:rPr>
+              <a:t> Test age 10 with </a:t>
+            </a:r>
+            <a:r>
+              <a:rPr sz="2400" b="0">
+                <a:solidFill>
+                  <a:srgbClr val="067D17"/>
+                </a:solidFill>
+                <a:latin typeface="JetBrains Mono"/>
+                <a:ea typeface="JetBrains Mono"/>
+                <a:cs typeface="JetBrains Mono"/>
+              </a:rPr>
+              <a:t>"no"</a:t>
+            </a:r>
+            <a:r>
+              <a:rPr sz="2400" b="0">
+                <a:solidFill>
+                  <a:srgbClr val="080808"/>
+                </a:solidFill>
+                <a:latin typeface="Calibri"/>
+                <a:ea typeface="Calibri"/>
+                <a:cs typeface="Calibri"/>
+              </a:rPr>
+              <a:t> for the ticket and </a:t>
+            </a:r>
+            <a:r>
+              <a:rPr sz="2400" b="0">
+                <a:solidFill>
+                  <a:srgbClr val="067D17"/>
+                </a:solidFill>
+                <a:latin typeface="JetBrains Mono"/>
+                <a:ea typeface="JetBrains Mono"/>
+                <a:cs typeface="JetBrains Mono"/>
+              </a:rPr>
+              <a:t>"yes"</a:t>
+            </a:r>
+            <a:r>
+              <a:rPr sz="2400" b="0">
+                <a:solidFill>
+                  <a:srgbClr val="080808"/>
+                </a:solidFill>
+                <a:latin typeface="Calibri"/>
+                <a:ea typeface="Calibri"/>
+                <a:cs typeface="Calibri"/>
+              </a:rPr>
+              <a:t> for the adult; display </a:t>
+            </a:r>
+            <a:r>
+              <a:rPr sz="2400" b="0">
+                <a:solidFill>
+                  <a:srgbClr val="067D17"/>
+                </a:solidFill>
+                <a:latin typeface="JetBrains Mono"/>
+                <a:ea typeface="JetBrains Mono"/>
+                <a:cs typeface="JetBrains Mono"/>
+              </a:rPr>
+              <a:t>"You may enter."</a:t>
             </a:r>
           </a:p>
         </p:txBody>
@@ -10128,7 +10315,7 @@
         </p:spPr>
         <p:txBody>
           <a:bodyPr xmlns:a="http://schemas.openxmlformats.org/drawingml/2006/main">
-            <a:normAutofit fontScale="100000"/>
+            <a:normAutofit fontScale="87835"/>
           </a:bodyPr>
           <a:lstStyle xmlns:a="http://schemas.openxmlformats.org/drawingml/2006/main"/>
           <a:p xmlns:a="http://schemas.openxmlformats.org/drawingml/2006/main">
@@ -10147,18 +10334,18 @@
                 <a:ea typeface="Calibri"/>
                 <a:cs typeface="Calibri"/>
               </a:rPr>
-              <a:t>Build a club checker that asks whether the visitor is a member and has a valid pass. Use and so entry is allowed only when both answers are </a:t>
+              <a:t>Ask whether the visitor is a member and store the answer in [member]. Ask whether the visitor has a valid pass and store the answer in [valid_pass]. Use the </a:t>
             </a:r>
             <a:r>
               <a:rPr sz="2400" b="0">
                 <a:solidFill>
-                  <a:srgbClr val="067D17"/>
-                </a:solidFill>
-                <a:latin typeface="JetBrains Mono"/>
-                <a:ea typeface="JetBrains Mono"/>
-                <a:cs typeface="JetBrains Mono"/>
-              </a:rPr>
-              <a:t>"yes"</a:t>
+                  <a:srgbClr val="1750EB"/>
+                </a:solidFill>
+                <a:latin typeface="JetBrains Mono"/>
+                <a:ea typeface="JetBrains Mono"/>
+                <a:cs typeface="JetBrains Mono"/>
+              </a:rPr>
+              <a:t>and</a:t>
             </a:r>
             <a:r>
               <a:rPr sz="2400" b="0">
@@ -10169,7 +10356,183 @@
                 <a:ea typeface="Calibri"/>
                 <a:cs typeface="Calibri"/>
               </a:rPr>
-              <a:t>; otherwise show a refusal. Test one allowed and one refused route.</a:t>
+              <a:t> operator in the </a:t>
+            </a:r>
+            <a:r>
+              <a:rPr sz="2400" b="0">
+                <a:solidFill>
+                  <a:srgbClr val="1750EB"/>
+                </a:solidFill>
+                <a:latin typeface="JetBrains Mono"/>
+                <a:ea typeface="JetBrains Mono"/>
+                <a:cs typeface="JetBrains Mono"/>
+              </a:rPr>
+              <a:t>if</a:t>
+            </a:r>
+            <a:r>
+              <a:rPr sz="2400" b="0">
+                <a:solidFill>
+                  <a:srgbClr val="080808"/>
+                </a:solidFill>
+                <a:latin typeface="Calibri"/>
+                <a:ea typeface="Calibri"/>
+                <a:cs typeface="Calibri"/>
+              </a:rPr>
+              <a:t> condition so </a:t>
+            </a:r>
+            <a:r>
+              <a:rPr sz="2400" b="0">
+                <a:solidFill>
+                  <a:srgbClr val="067D17"/>
+                </a:solidFill>
+                <a:latin typeface="JetBrains Mono"/>
+                <a:ea typeface="JetBrains Mono"/>
+                <a:cs typeface="JetBrains Mono"/>
+              </a:rPr>
+              <a:t>"Club entry allowed."</a:t>
+            </a:r>
+            <a:r>
+              <a:rPr sz="2400" b="0">
+                <a:solidFill>
+                  <a:srgbClr val="080808"/>
+                </a:solidFill>
+                <a:latin typeface="Calibri"/>
+                <a:ea typeface="Calibri"/>
+                <a:cs typeface="Calibri"/>
+              </a:rPr>
+              <a:t> is displayed only when both answers are </a:t>
+            </a:r>
+            <a:r>
+              <a:rPr sz="2400" b="0">
+                <a:solidFill>
+                  <a:srgbClr val="067D17"/>
+                </a:solidFill>
+                <a:latin typeface="JetBrains Mono"/>
+                <a:ea typeface="JetBrains Mono"/>
+                <a:cs typeface="JetBrains Mono"/>
+              </a:rPr>
+              <a:t>"yes"</a:t>
+            </a:r>
+            <a:r>
+              <a:rPr sz="2400" b="0">
+                <a:solidFill>
+                  <a:srgbClr val="080808"/>
+                </a:solidFill>
+                <a:latin typeface="Calibri"/>
+                <a:ea typeface="Calibri"/>
+                <a:cs typeface="Calibri"/>
+              </a:rPr>
+              <a:t>; otherwise display </a:t>
+            </a:r>
+            <a:r>
+              <a:rPr sz="2400" b="0">
+                <a:solidFill>
+                  <a:srgbClr val="067D17"/>
+                </a:solidFill>
+                <a:latin typeface="JetBrains Mono"/>
+                <a:ea typeface="JetBrains Mono"/>
+                <a:cs typeface="JetBrains Mono"/>
+              </a:rPr>
+              <a:t>"Club entry refused."</a:t>
+            </a:r>
+            <a:r>
+              <a:rPr sz="2400" b="0">
+                <a:solidFill>
+                  <a:srgbClr val="080808"/>
+                </a:solidFill>
+                <a:latin typeface="Calibri"/>
+                <a:ea typeface="Calibri"/>
+                <a:cs typeface="Calibri"/>
+              </a:rPr>
+              <a:t> Test </a:t>
+            </a:r>
+            <a:r>
+              <a:rPr sz="2400" b="0">
+                <a:solidFill>
+                  <a:srgbClr val="067D17"/>
+                </a:solidFill>
+                <a:latin typeface="JetBrains Mono"/>
+                <a:ea typeface="JetBrains Mono"/>
+                <a:cs typeface="JetBrains Mono"/>
+              </a:rPr>
+              <a:t>"yes"</a:t>
+            </a:r>
+            <a:r>
+              <a:rPr sz="2400" b="0">
+                <a:solidFill>
+                  <a:srgbClr val="080808"/>
+                </a:solidFill>
+                <a:latin typeface="Calibri"/>
+                <a:ea typeface="Calibri"/>
+                <a:cs typeface="Calibri"/>
+              </a:rPr>
+              <a:t> and </a:t>
+            </a:r>
+            <a:r>
+              <a:rPr sz="2400" b="0">
+                <a:solidFill>
+                  <a:srgbClr val="067D17"/>
+                </a:solidFill>
+                <a:latin typeface="JetBrains Mono"/>
+                <a:ea typeface="JetBrains Mono"/>
+                <a:cs typeface="JetBrains Mono"/>
+              </a:rPr>
+              <a:t>"yes"</a:t>
+            </a:r>
+            <a:r>
+              <a:rPr sz="2400" b="0">
+                <a:solidFill>
+                  <a:srgbClr val="080808"/>
+                </a:solidFill>
+                <a:latin typeface="Calibri"/>
+                <a:ea typeface="Calibri"/>
+                <a:cs typeface="Calibri"/>
+              </a:rPr>
+              <a:t>, then test </a:t>
+            </a:r>
+            <a:r>
+              <a:rPr sz="2400" b="0">
+                <a:solidFill>
+                  <a:srgbClr val="067D17"/>
+                </a:solidFill>
+                <a:latin typeface="JetBrains Mono"/>
+                <a:ea typeface="JetBrains Mono"/>
+                <a:cs typeface="JetBrains Mono"/>
+              </a:rPr>
+              <a:t>"yes"</a:t>
+            </a:r>
+            <a:r>
+              <a:rPr sz="2400" b="0">
+                <a:solidFill>
+                  <a:srgbClr val="080808"/>
+                </a:solidFill>
+                <a:latin typeface="Calibri"/>
+                <a:ea typeface="Calibri"/>
+                <a:cs typeface="Calibri"/>
+              </a:rPr>
+              <a:t> and </a:t>
+            </a:r>
+            <a:r>
+              <a:rPr sz="2400" b="0">
+                <a:solidFill>
+                  <a:srgbClr val="067D17"/>
+                </a:solidFill>
+                <a:latin typeface="JetBrains Mono"/>
+                <a:ea typeface="JetBrains Mono"/>
+                <a:cs typeface="JetBrains Mono"/>
+              </a:rPr>
+              <a:t>"no"</a:t>
+            </a:r>
+            <a:r>
+              <a:rPr sz="2400" b="0">
+                <a:solidFill>
+                  <a:srgbClr val="080808"/>
+                </a:solidFill>
+                <a:latin typeface="Calibri"/>
+                <a:ea typeface="Calibri"/>
+                <a:cs typeface="Calibri"/>
+              </a:rPr>
+              <a:t>.</a:t>
             </a:r>
           </a:p>
         </p:txBody>

--- a/Mapped Curriculum Lessons/Grade 6/Lesson 06 - Logical Choices/Logical Choices - Slides.pptx
+++ b/Mapped Curriculum Lessons/Grade 6/Lesson 06 - Logical Choices/Logical Choices - Slides.pptx
@@ -2,28 +2,28 @@
 <file path=ppt/presentation.xml><?xml version="1.0" encoding="utf-8"?>
 <p:presentation xmlns:p="http://schemas.openxmlformats.org/presentationml/2006/main" embedTrueTypeFonts="1" saveSubsetFonts="0">
   <p:sldMasterIdLst>
-    <p:sldMasterId xmlns:r="http://schemas.openxmlformats.org/officeDocument/2006/relationships" id="2147483648" r:id="Rf86939b95e104cd7"/>
+    <p:sldMasterId xmlns:r="http://schemas.openxmlformats.org/officeDocument/2006/relationships" id="2147483648" r:id="Rd451db3c8f5b4f93"/>
   </p:sldMasterIdLst>
   <p:notesMasterIdLst>
-    <p:notesMasterId xmlns:r="http://schemas.openxmlformats.org/officeDocument/2006/relationships" r:id="Rbdfee60d81064ee7"/>
+    <p:notesMasterId xmlns:r="http://schemas.openxmlformats.org/officeDocument/2006/relationships" r:id="R240788ad4ca642b5"/>
   </p:notesMasterIdLst>
   <p:sldIdLst>
-    <p:sldId xmlns:r="http://schemas.openxmlformats.org/officeDocument/2006/relationships" id="256" r:id="R9951eb4ab5a44c75"/>
-    <p:sldId xmlns:r="http://schemas.openxmlformats.org/officeDocument/2006/relationships" id="257" r:id="R791bbb8dc9334d3e"/>
-    <p:sldId xmlns:r="http://schemas.openxmlformats.org/officeDocument/2006/relationships" id="258" r:id="Rcbefde46f3f6414e"/>
-    <p:sldId xmlns:r="http://schemas.openxmlformats.org/officeDocument/2006/relationships" id="259" r:id="R8645d1fbbd39449b"/>
-    <p:sldId xmlns:r="http://schemas.openxmlformats.org/officeDocument/2006/relationships" id="260" r:id="R49d5f225dc0644d2"/>
-    <p:sldId xmlns:r="http://schemas.openxmlformats.org/officeDocument/2006/relationships" id="261" r:id="Ree3eb617a2bb487b"/>
-    <p:sldId xmlns:r="http://schemas.openxmlformats.org/officeDocument/2006/relationships" id="262" r:id="R04dbdb57ff584fbb"/>
-    <p:sldId xmlns:r="http://schemas.openxmlformats.org/officeDocument/2006/relationships" id="263" r:id="R289d8db58e9744df"/>
-    <p:sldId xmlns:r="http://schemas.openxmlformats.org/officeDocument/2006/relationships" id="264" r:id="R6d13a2eb0b1b48af"/>
+    <p:sldId xmlns:r="http://schemas.openxmlformats.org/officeDocument/2006/relationships" id="256" r:id="R7820576b97e54524"/>
+    <p:sldId xmlns:r="http://schemas.openxmlformats.org/officeDocument/2006/relationships" id="257" r:id="R91613058f15746f0"/>
+    <p:sldId xmlns:r="http://schemas.openxmlformats.org/officeDocument/2006/relationships" id="258" r:id="Rdb77711515e34c05"/>
+    <p:sldId xmlns:r="http://schemas.openxmlformats.org/officeDocument/2006/relationships" id="259" r:id="R7c1b5bdf01e14eca"/>
+    <p:sldId xmlns:r="http://schemas.openxmlformats.org/officeDocument/2006/relationships" id="260" r:id="Raa93be10228f4d8b"/>
+    <p:sldId xmlns:r="http://schemas.openxmlformats.org/officeDocument/2006/relationships" id="261" r:id="R13e53c9b9ff94a26"/>
+    <p:sldId xmlns:r="http://schemas.openxmlformats.org/officeDocument/2006/relationships" id="262" r:id="R5658b2a0d27a461d"/>
+    <p:sldId xmlns:r="http://schemas.openxmlformats.org/officeDocument/2006/relationships" id="263" r:id="R8f7b5e2b7ab5424f"/>
+    <p:sldId xmlns:r="http://schemas.openxmlformats.org/officeDocument/2006/relationships" id="264" r:id="R284bc5abcca44813"/>
   </p:sldIdLst>
   <p:sldSz cx="12192000" cy="6858000"/>
   <p:notesSz cx="6858000" cy="9144000"/>
   <p:embeddedFontLst>
     <p:embeddedFont>
       <p:font typeface="JetBrains Mono"/>
-      <p:regular xmlns:r="http://schemas.openxmlformats.org/officeDocument/2006/relationships" r:id="Rc1f1a0423d59430f"/>
+      <p:regular xmlns:r="http://schemas.openxmlformats.org/officeDocument/2006/relationships" r:id="R1629863a2b264c2e"/>
     </p:embeddedFont>
   </p:embeddedFontLst>
 </p:presentation>
@@ -1071,7 +1071,7 @@
           <p:nvPr/>
         </p:nvPicPr>
         <p:blipFill rotWithShape="1">
-          <a:blip xmlns:r="http://schemas.openxmlformats.org/officeDocument/2006/relationships" xmlns:a="http://schemas.openxmlformats.org/drawingml/2006/main" r:embed="R6a387bbd6a174931"/>
+          <a:blip xmlns:r="http://schemas.openxmlformats.org/officeDocument/2006/relationships" xmlns:a="http://schemas.openxmlformats.org/drawingml/2006/main" r:embed="R2f5cf422e3584b11"/>
           <a:stretch xmlns:a="http://schemas.openxmlformats.org/drawingml/2006/main"/>
         </p:blipFill>
         <p:spPr>
@@ -1451,7 +1451,7 @@
           <p:nvPr/>
         </p:nvPicPr>
         <p:blipFill rotWithShape="1">
-          <a:blip xmlns:r="http://schemas.openxmlformats.org/officeDocument/2006/relationships" xmlns:a="http://schemas.openxmlformats.org/drawingml/2006/main" r:embed="Reddaa3b7f6a042e7">
+          <a:blip xmlns:r="http://schemas.openxmlformats.org/officeDocument/2006/relationships" xmlns:a="http://schemas.openxmlformats.org/drawingml/2006/main" r:embed="R0682152df7bf4d96">
             <a:alphaModFix amt="28000"/>
           </a:blip>
           <a:stretch xmlns:a="http://schemas.openxmlformats.org/drawingml/2006/main"/>
@@ -1664,7 +1664,7 @@
           <p:nvPr/>
         </p:nvPicPr>
         <p:blipFill rotWithShape="1">
-          <a:blip xmlns:r="http://schemas.openxmlformats.org/officeDocument/2006/relationships" xmlns:a="http://schemas.openxmlformats.org/drawingml/2006/main" r:embed="Rca8aaea1142541ce">
+          <a:blip xmlns:r="http://schemas.openxmlformats.org/officeDocument/2006/relationships" xmlns:a="http://schemas.openxmlformats.org/drawingml/2006/main" r:embed="R02816fcf3ca44271">
             <a:alphaModFix amt="28000"/>
           </a:blip>
           <a:stretch xmlns:a="http://schemas.openxmlformats.org/drawingml/2006/main"/>
@@ -1899,7 +1899,7 @@
           <p:nvPr/>
         </p:nvPicPr>
         <p:blipFill rotWithShape="1">
-          <a:blip xmlns:r="http://schemas.openxmlformats.org/officeDocument/2006/relationships" xmlns:a="http://schemas.openxmlformats.org/drawingml/2006/main" r:embed="R450caab494a04138">
+          <a:blip xmlns:r="http://schemas.openxmlformats.org/officeDocument/2006/relationships" xmlns:a="http://schemas.openxmlformats.org/drawingml/2006/main" r:embed="Rc850d6bc828748c5">
             <a:alphaModFix amt="28000"/>
           </a:blip>
           <a:stretch xmlns:a="http://schemas.openxmlformats.org/drawingml/2006/main"/>
@@ -2176,7 +2176,7 @@
           <p:nvPr/>
         </p:nvPicPr>
         <p:blipFill rotWithShape="1">
-          <a:blip xmlns:r="http://schemas.openxmlformats.org/officeDocument/2006/relationships" xmlns:a="http://schemas.openxmlformats.org/drawingml/2006/main" r:embed="Rf05a307475b54f46">
+          <a:blip xmlns:r="http://schemas.openxmlformats.org/officeDocument/2006/relationships" xmlns:a="http://schemas.openxmlformats.org/drawingml/2006/main" r:embed="Rca7735065cf0480b">
             <a:alphaModFix amt="28000"/>
           </a:blip>
           <a:stretch xmlns:a="http://schemas.openxmlformats.org/drawingml/2006/main"/>
@@ -2451,7 +2451,7 @@
           <p:nvPr/>
         </p:nvPicPr>
         <p:blipFill rotWithShape="1">
-          <a:blip xmlns:r="http://schemas.openxmlformats.org/officeDocument/2006/relationships" xmlns:a="http://schemas.openxmlformats.org/drawingml/2006/main" r:embed="R39ed3b7f24ae4aaa">
+          <a:blip xmlns:r="http://schemas.openxmlformats.org/officeDocument/2006/relationships" xmlns:a="http://schemas.openxmlformats.org/drawingml/2006/main" r:embed="Raf0ff1e2774741b3">
             <a:alphaModFix amt="28000"/>
           </a:blip>
           <a:stretch xmlns:a="http://schemas.openxmlformats.org/drawingml/2006/main"/>
@@ -2875,7 +2875,7 @@
           <p:nvPr/>
         </p:nvPicPr>
         <p:blipFill rotWithShape="1">
-          <a:blip xmlns:r="http://schemas.openxmlformats.org/officeDocument/2006/relationships" xmlns:a="http://schemas.openxmlformats.org/drawingml/2006/main" r:embed="R7a0a5e480fcc470c">
+          <a:blip xmlns:r="http://schemas.openxmlformats.org/officeDocument/2006/relationships" xmlns:a="http://schemas.openxmlformats.org/drawingml/2006/main" r:embed="R48d93bb476f04286">
             <a:alphaModFix amt="28000"/>
           </a:blip>
           <a:stretch xmlns:a="http://schemas.openxmlformats.org/drawingml/2006/main"/>
@@ -3016,7 +3016,7 @@
           <p:nvPr/>
         </p:nvPicPr>
         <p:blipFill rotWithShape="1">
-          <a:blip xmlns:r="http://schemas.openxmlformats.org/officeDocument/2006/relationships" xmlns:a="http://schemas.openxmlformats.org/drawingml/2006/main" r:embed="R333eb9617c054e06">
+          <a:blip xmlns:r="http://schemas.openxmlformats.org/officeDocument/2006/relationships" xmlns:a="http://schemas.openxmlformats.org/drawingml/2006/main" r:embed="Rbcfcdbcf59c94a5e">
             <a:alphaModFix amt="28000"/>
           </a:blip>
           <a:stretch xmlns:a="http://schemas.openxmlformats.org/drawingml/2006/main"/>
@@ -3130,7 +3130,7 @@
           <p:nvPr/>
         </p:nvPicPr>
         <p:blipFill rotWithShape="1">
-          <a:blip xmlns:r="http://schemas.openxmlformats.org/officeDocument/2006/relationships" xmlns:a="http://schemas.openxmlformats.org/drawingml/2006/main" r:embed="R7a31a42780fb49a5">
+          <a:blip xmlns:r="http://schemas.openxmlformats.org/officeDocument/2006/relationships" xmlns:a="http://schemas.openxmlformats.org/drawingml/2006/main" r:embed="Rae81f2ae596e416b">
             <a:alphaModFix amt="28000"/>
           </a:blip>
           <a:stretch xmlns:a="http://schemas.openxmlformats.org/drawingml/2006/main"/>
@@ -3457,7 +3457,7 @@
           <p:nvPr/>
         </p:nvPicPr>
         <p:blipFill rotWithShape="1">
-          <a:blip xmlns:r="http://schemas.openxmlformats.org/officeDocument/2006/relationships" xmlns:a="http://schemas.openxmlformats.org/drawingml/2006/main" r:embed="R032bda891a3d405b">
+          <a:blip xmlns:r="http://schemas.openxmlformats.org/officeDocument/2006/relationships" xmlns:a="http://schemas.openxmlformats.org/drawingml/2006/main" r:embed="R207ddb4228c84a15">
             <a:alphaModFix amt="28000"/>
           </a:blip>
           <a:stretch xmlns:a="http://schemas.openxmlformats.org/drawingml/2006/main"/>
@@ -3745,7 +3745,7 @@
           <p:nvPr/>
         </p:nvPicPr>
         <p:blipFill rotWithShape="1">
-          <a:blip xmlns:r="http://schemas.openxmlformats.org/officeDocument/2006/relationships" xmlns:a="http://schemas.openxmlformats.org/drawingml/2006/main" r:embed="R75a7b2d6167b424a">
+          <a:blip xmlns:r="http://schemas.openxmlformats.org/officeDocument/2006/relationships" xmlns:a="http://schemas.openxmlformats.org/drawingml/2006/main" r:embed="R3e3a4c1f096147b1">
             <a:alphaModFix amt="28000"/>
           </a:blip>
           <a:stretch xmlns:a="http://schemas.openxmlformats.org/drawingml/2006/main"/>
@@ -3982,17 +3982,17 @@
   </p:cSld>
   <p:clrMap bg1="lt1" tx1="dk1" bg2="lt2" tx2="dk2" accent1="accent1" accent2="accent2" accent3="accent3" accent4="accent4" accent5="accent5" accent6="accent6" hlink="hlink" folHlink="folHlink"/>
   <p:sldLayoutIdLst>
-    <p:sldLayoutId xmlns:r="http://schemas.openxmlformats.org/officeDocument/2006/relationships" id="2147483649" r:id="Rc7acf63b611340cd"/>
-    <p:sldLayoutId xmlns:r="http://schemas.openxmlformats.org/officeDocument/2006/relationships" id="2147483650" r:id="R793759ddf74d47f8"/>
-    <p:sldLayoutId xmlns:r="http://schemas.openxmlformats.org/officeDocument/2006/relationships" id="2147483651" r:id="Rf257145d88b740b7"/>
-    <p:sldLayoutId xmlns:r="http://schemas.openxmlformats.org/officeDocument/2006/relationships" id="2147483652" r:id="Rafcfb7f844874c1f"/>
-    <p:sldLayoutId xmlns:r="http://schemas.openxmlformats.org/officeDocument/2006/relationships" id="2147483653" r:id="Rc1b8b2151f5148d8"/>
-    <p:sldLayoutId xmlns:r="http://schemas.openxmlformats.org/officeDocument/2006/relationships" id="2147483654" r:id="Re7701869fcb141cf"/>
-    <p:sldLayoutId xmlns:r="http://schemas.openxmlformats.org/officeDocument/2006/relationships" id="2147483655" r:id="Rb5b0993eb3f94152"/>
-    <p:sldLayoutId xmlns:r="http://schemas.openxmlformats.org/officeDocument/2006/relationships" id="2147483656" r:id="Re7a072f8ba9640f3"/>
-    <p:sldLayoutId xmlns:r="http://schemas.openxmlformats.org/officeDocument/2006/relationships" id="2147483657" r:id="R7e26961603f34c57"/>
-    <p:sldLayoutId xmlns:r="http://schemas.openxmlformats.org/officeDocument/2006/relationships" id="2147483658" r:id="R9c135640168443fa"/>
-    <p:sldLayoutId xmlns:r="http://schemas.openxmlformats.org/officeDocument/2006/relationships" id="2147483659" r:id="Ra002468f09b145a8"/>
+    <p:sldLayoutId xmlns:r="http://schemas.openxmlformats.org/officeDocument/2006/relationships" id="2147483649" r:id="R82850e9fa680439e"/>
+    <p:sldLayoutId xmlns:r="http://schemas.openxmlformats.org/officeDocument/2006/relationships" id="2147483650" r:id="R6b36e095515e4179"/>
+    <p:sldLayoutId xmlns:r="http://schemas.openxmlformats.org/officeDocument/2006/relationships" id="2147483651" r:id="R431a891ca0404568"/>
+    <p:sldLayoutId xmlns:r="http://schemas.openxmlformats.org/officeDocument/2006/relationships" id="2147483652" r:id="R4d414062e1c242b3"/>
+    <p:sldLayoutId xmlns:r="http://schemas.openxmlformats.org/officeDocument/2006/relationships" id="2147483653" r:id="R6614776dffdc454f"/>
+    <p:sldLayoutId xmlns:r="http://schemas.openxmlformats.org/officeDocument/2006/relationships" id="2147483654" r:id="Rb77f125e4e2c4bc2"/>
+    <p:sldLayoutId xmlns:r="http://schemas.openxmlformats.org/officeDocument/2006/relationships" id="2147483655" r:id="R5872f28dbe174223"/>
+    <p:sldLayoutId xmlns:r="http://schemas.openxmlformats.org/officeDocument/2006/relationships" id="2147483656" r:id="Re346244f21094c6b"/>
+    <p:sldLayoutId xmlns:r="http://schemas.openxmlformats.org/officeDocument/2006/relationships" id="2147483657" r:id="R1418bdb4c9c54011"/>
+    <p:sldLayoutId xmlns:r="http://schemas.openxmlformats.org/officeDocument/2006/relationships" id="2147483658" r:id="Ra726c52fca034ee8"/>
+    <p:sldLayoutId xmlns:r="http://schemas.openxmlformats.org/officeDocument/2006/relationships" id="2147483659" r:id="R1b524a13b60f422f"/>
   </p:sldLayoutIdLst>
   <p:hf hdr="0" ftr="0" dt="0"/>
   <p:txStyles>
@@ -8287,7 +8287,51 @@
                 <a:ea typeface="Calibri"/>
                 <a:cs typeface="Calibri"/>
               </a:rPr>
-              <a:t>Change the age check from 12 to 14. Test ages 13 and 14 with a ticket.</a:t>
+              <a:t>Change the example so visitors must also be 17 or under. Add this rule with the </a:t>
+            </a:r>
+            <a:r>
+              <a:rPr sz="2050" b="0">
+                <a:solidFill>
+                  <a:srgbClr val="1750EB"/>
+                </a:solidFill>
+                <a:latin typeface="JetBrains Mono"/>
+                <a:ea typeface="JetBrains Mono"/>
+                <a:cs typeface="JetBrains Mono"/>
+              </a:rPr>
+              <a:t>and</a:t>
+            </a:r>
+            <a:r>
+              <a:rPr sz="2400" b="0">
+                <a:solidFill>
+                  <a:srgbClr val="080808"/>
+                </a:solidFill>
+                <a:latin typeface="Calibri"/>
+                <a:ea typeface="Calibri"/>
+                <a:cs typeface="Calibri"/>
+              </a:rPr>
+              <a:t> operator and &lt;=. For example, age 14 with a ticket displays </a:t>
+            </a:r>
+            <a:r>
+              <a:rPr sz="2050" b="0">
+                <a:solidFill>
+                  <a:srgbClr val="067D17"/>
+                </a:solidFill>
+                <a:latin typeface="JetBrains Mono"/>
+                <a:ea typeface="JetBrains Mono"/>
+                <a:cs typeface="JetBrains Mono"/>
+              </a:rPr>
+              <a:t>"You may enter."</a:t>
+            </a:r>
+            <a:r>
+              <a:rPr sz="2400" b="0">
+                <a:solidFill>
+                  <a:srgbClr val="080808"/>
+                </a:solidFill>
+                <a:latin typeface="Calibri"/>
+                <a:ea typeface="Calibri"/>
+                <a:cs typeface="Calibri"/>
+              </a:rPr>
+              <a:t> but age 18 with a ticket does not.</a:t>
             </a:r>
           </a:p>
         </p:txBody>
@@ -9198,7 +9242,7 @@
         </p:spPr>
         <p:txBody>
           <a:bodyPr xmlns:a="http://schemas.openxmlformats.org/drawingml/2006/main">
-            <a:normAutofit fontScale="94520"/>
+            <a:normAutofit fontScale="100000"/>
           </a:bodyPr>
           <a:lstStyle xmlns:a="http://schemas.openxmlformats.org/drawingml/2006/main"/>
           <a:p xmlns:a="http://schemas.openxmlformats.org/drawingml/2006/main">
@@ -9217,10 +9261,10 @@
                 <a:ea typeface="Calibri"/>
                 <a:cs typeface="Calibri"/>
               </a:rPr>
-              <a:t>Change the </a:t>
-            </a:r>
-            <a:r>
-              <a:rPr sz="2400" b="0">
+              <a:t>Change the entry rule in the example: visitors aged 12 or over need a ticket, but anyone with an adult may enter at any age. Rewrite the condition using the </a:t>
+            </a:r>
+            <a:r>
+              <a:rPr sz="2050" b="0">
                 <a:solidFill>
                   <a:srgbClr val="1750EB"/>
                 </a:solidFill>
@@ -9228,7 +9272,7 @@
                 <a:ea typeface="JetBrains Mono"/>
                 <a:cs typeface="JetBrains Mono"/>
               </a:rPr>
-              <a:t>if</a:t>
+              <a:t>and</a:t>
             </a:r>
             <a:r>
               <a:rPr sz="2400" b="0">
@@ -9239,10 +9283,10 @@
                 <a:ea typeface="Calibri"/>
                 <a:cs typeface="Calibri"/>
               </a:rPr>
-              <a:t> condition. Use the </a:t>
-            </a:r>
-            <a:r>
-              <a:rPr sz="2400" b="0">
+              <a:t> operator and the </a:t>
+            </a:r>
+            <a:r>
+              <a:rPr sz="2050" b="0">
                 <a:solidFill>
                   <a:srgbClr val="1750EB"/>
                 </a:solidFill>
@@ -9250,7 +9294,7 @@
                 <a:ea typeface="JetBrains Mono"/>
                 <a:cs typeface="JetBrains Mono"/>
               </a:rPr>
-              <a:t>and</a:t>
+              <a:t>or</a:t>
             </a:r>
             <a:r>
               <a:rPr sz="2400" b="0">
@@ -9261,142 +9305,10 @@
                 <a:ea typeface="Calibri"/>
                 <a:cs typeface="Calibri"/>
               </a:rPr>
-              <a:t> operator to allow entry when [age] is at least 12 and [has_ticket] is </a:t>
-            </a:r>
-            <a:r>
-              <a:rPr sz="2400" b="0">
-                <a:solidFill>
-                  <a:srgbClr val="067D17"/>
-                </a:solidFill>
-                <a:latin typeface="JetBrains Mono"/>
-                <a:ea typeface="JetBrains Mono"/>
-                <a:cs typeface="JetBrains Mono"/>
-              </a:rPr>
-              <a:t>"yes"</a:t>
-            </a:r>
-            <a:r>
-              <a:rPr sz="2400" b="0">
-                <a:solidFill>
-                  <a:srgbClr val="080808"/>
-                </a:solidFill>
-                <a:latin typeface="Calibri"/>
-                <a:ea typeface="Calibri"/>
-                <a:cs typeface="Calibri"/>
-              </a:rPr>
-              <a:t>. Use the </a:t>
-            </a:r>
-            <a:r>
-              <a:rPr sz="2400" b="0">
-                <a:solidFill>
-                  <a:srgbClr val="1750EB"/>
-                </a:solidFill>
-                <a:latin typeface="JetBrains Mono"/>
-                <a:ea typeface="JetBrains Mono"/>
-                <a:cs typeface="JetBrains Mono"/>
-              </a:rPr>
-              <a:t>or</a:t>
-            </a:r>
-            <a:r>
-              <a:rPr sz="2400" b="0">
-                <a:solidFill>
-                  <a:srgbClr val="080808"/>
-                </a:solidFill>
-                <a:latin typeface="Calibri"/>
-                <a:ea typeface="Calibri"/>
-                <a:cs typeface="Calibri"/>
-              </a:rPr>
-              <a:t> operator to also allow entry when [has_adult] is </a:t>
-            </a:r>
-            <a:r>
-              <a:rPr sz="2400" b="0">
-                <a:solidFill>
-                  <a:srgbClr val="067D17"/>
-                </a:solidFill>
-                <a:latin typeface="JetBrains Mono"/>
-                <a:ea typeface="JetBrains Mono"/>
-                <a:cs typeface="JetBrains Mono"/>
-              </a:rPr>
-              <a:t>"yes"</a:t>
-            </a:r>
-            <a:r>
-              <a:rPr sz="2400" b="0">
-                <a:solidFill>
-                  <a:srgbClr val="080808"/>
-                </a:solidFill>
-                <a:latin typeface="Calibri"/>
-                <a:ea typeface="Calibri"/>
-                <a:cs typeface="Calibri"/>
-              </a:rPr>
-              <a:t>. Otherwise, display </a:t>
-            </a:r>
-            <a:r>
-              <a:rPr sz="2400" b="0">
-                <a:solidFill>
-                  <a:srgbClr val="067D17"/>
-                </a:solidFill>
-                <a:latin typeface="JetBrains Mono"/>
-                <a:ea typeface="JetBrains Mono"/>
-                <a:cs typeface="JetBrains Mono"/>
-              </a:rPr>
-              <a:t>"Please check the entry rules."</a:t>
-            </a:r>
-            <a:r>
-              <a:rPr sz="2400" b="0">
-                <a:solidFill>
-                  <a:srgbClr val="080808"/>
-                </a:solidFill>
-                <a:latin typeface="Calibri"/>
-                <a:ea typeface="Calibri"/>
-                <a:cs typeface="Calibri"/>
-              </a:rPr>
-              <a:t> Test age 10 with </a:t>
-            </a:r>
-            <a:r>
-              <a:rPr sz="2400" b="0">
-                <a:solidFill>
-                  <a:srgbClr val="067D17"/>
-                </a:solidFill>
-                <a:latin typeface="JetBrains Mono"/>
-                <a:ea typeface="JetBrains Mono"/>
-                <a:cs typeface="JetBrains Mono"/>
-              </a:rPr>
-              <a:t>"no"</a:t>
-            </a:r>
-            <a:r>
-              <a:rPr sz="2400" b="0">
-                <a:solidFill>
-                  <a:srgbClr val="080808"/>
-                </a:solidFill>
-                <a:latin typeface="Calibri"/>
-                <a:ea typeface="Calibri"/>
-                <a:cs typeface="Calibri"/>
-              </a:rPr>
-              <a:t> for the ticket and </a:t>
-            </a:r>
-            <a:r>
-              <a:rPr sz="2400" b="0">
-                <a:solidFill>
-                  <a:srgbClr val="067D17"/>
-                </a:solidFill>
-                <a:latin typeface="JetBrains Mono"/>
-                <a:ea typeface="JetBrains Mono"/>
-                <a:cs typeface="JetBrains Mono"/>
-              </a:rPr>
-              <a:t>"yes"</a:t>
-            </a:r>
-            <a:r>
-              <a:rPr sz="2400" b="0">
-                <a:solidFill>
-                  <a:srgbClr val="080808"/>
-                </a:solidFill>
-                <a:latin typeface="Calibri"/>
-                <a:ea typeface="Calibri"/>
-                <a:cs typeface="Calibri"/>
-              </a:rPr>
-              <a:t> for the adult; display </a:t>
-            </a:r>
-            <a:r>
-              <a:rPr sz="2400" b="0">
+              <a:t> operator. For example, age 10, no ticket and an adult displays </a:t>
+            </a:r>
+            <a:r>
+              <a:rPr sz="2050" b="0">
                 <a:solidFill>
                   <a:srgbClr val="067D17"/>
                 </a:solidFill>
@@ -10315,7 +10227,7 @@
         </p:spPr>
         <p:txBody>
           <a:bodyPr xmlns:a="http://schemas.openxmlformats.org/drawingml/2006/main">
-            <a:normAutofit fontScale="87835"/>
+            <a:normAutofit fontScale="100000"/>
           </a:bodyPr>
           <a:lstStyle xmlns:a="http://schemas.openxmlformats.org/drawingml/2006/main"/>
           <a:p xmlns:a="http://schemas.openxmlformats.org/drawingml/2006/main">
@@ -10334,18 +10246,18 @@
                 <a:ea typeface="Calibri"/>
                 <a:cs typeface="Calibri"/>
               </a:rPr>
-              <a:t>Ask whether the visitor is a member and store the answer in [member]. Ask whether the visitor has a valid pass and store the answer in [valid_pass]. Use the </a:t>
-            </a:r>
-            <a:r>
-              <a:rPr sz="2400" b="0">
-                <a:solidFill>
-                  <a:srgbClr val="1750EB"/>
-                </a:solidFill>
-                <a:latin typeface="JetBrains Mono"/>
-                <a:ea typeface="JetBrains Mono"/>
-                <a:cs typeface="JetBrains Mono"/>
-              </a:rPr>
-              <a:t>and</a:t>
+              <a:t>Create a cinema-ticket program that asks for the user's age and whether they are a student. Display </a:t>
+            </a:r>
+            <a:r>
+              <a:rPr sz="2050" b="0">
+                <a:solidFill>
+                  <a:srgbClr val="067D17"/>
+                </a:solidFill>
+                <a:latin typeface="JetBrains Mono"/>
+                <a:ea typeface="JetBrains Mono"/>
+                <a:cs typeface="JetBrains Mono"/>
+              </a:rPr>
+              <a:t>"Discount price"</a:t>
             </a:r>
             <a:r>
               <a:rPr sz="2400" b="0">
@@ -10356,18 +10268,18 @@
                 <a:ea typeface="Calibri"/>
                 <a:cs typeface="Calibri"/>
               </a:rPr>
-              <a:t> operator in the </a:t>
-            </a:r>
-            <a:r>
-              <a:rPr sz="2400" b="0">
-                <a:solidFill>
-                  <a:srgbClr val="1750EB"/>
-                </a:solidFill>
-                <a:latin typeface="JetBrains Mono"/>
-                <a:ea typeface="JetBrains Mono"/>
-                <a:cs typeface="JetBrains Mono"/>
-              </a:rPr>
-              <a:t>if</a:t>
+              <a:t> for anyone under 16, or for students aged 25 or under; otherwise display </a:t>
+            </a:r>
+            <a:r>
+              <a:rPr sz="2050" b="0">
+                <a:solidFill>
+                  <a:srgbClr val="067D17"/>
+                </a:solidFill>
+                <a:latin typeface="JetBrains Mono"/>
+                <a:ea typeface="JetBrains Mono"/>
+                <a:cs typeface="JetBrains Mono"/>
+              </a:rPr>
+              <a:t>"Full price"</a:t>
             </a:r>
             <a:r>
               <a:rPr sz="2400" b="0">
@@ -10378,18 +10290,18 @@
                 <a:ea typeface="Calibri"/>
                 <a:cs typeface="Calibri"/>
               </a:rPr>
-              <a:t> condition so </a:t>
-            </a:r>
-            <a:r>
-              <a:rPr sz="2400" b="0">
-                <a:solidFill>
-                  <a:srgbClr val="067D17"/>
-                </a:solidFill>
-                <a:latin typeface="JetBrains Mono"/>
-                <a:ea typeface="JetBrains Mono"/>
-                <a:cs typeface="JetBrains Mono"/>
-              </a:rPr>
-              <a:t>"Club entry allowed."</a:t>
+              <a:t>. Use the </a:t>
+            </a:r>
+            <a:r>
+              <a:rPr sz="2050" b="0">
+                <a:solidFill>
+                  <a:srgbClr val="1750EB"/>
+                </a:solidFill>
+                <a:latin typeface="JetBrains Mono"/>
+                <a:ea typeface="JetBrains Mono"/>
+                <a:cs typeface="JetBrains Mono"/>
+              </a:rPr>
+              <a:t>and</a:t>
             </a:r>
             <a:r>
               <a:rPr sz="2400" b="0">
@@ -10400,18 +10312,18 @@
                 <a:ea typeface="Calibri"/>
                 <a:cs typeface="Calibri"/>
               </a:rPr>
-              <a:t> is displayed only when both answers are </a:t>
-            </a:r>
-            <a:r>
-              <a:rPr sz="2400" b="0">
-                <a:solidFill>
-                  <a:srgbClr val="067D17"/>
-                </a:solidFill>
-                <a:latin typeface="JetBrains Mono"/>
-                <a:ea typeface="JetBrains Mono"/>
-                <a:cs typeface="JetBrains Mono"/>
-              </a:rPr>
-              <a:t>"yes"</a:t>
+              <a:t> operator and the </a:t>
+            </a:r>
+            <a:r>
+              <a:rPr sz="2050" b="0">
+                <a:solidFill>
+                  <a:srgbClr val="1750EB"/>
+                </a:solidFill>
+                <a:latin typeface="JetBrains Mono"/>
+                <a:ea typeface="JetBrains Mono"/>
+                <a:cs typeface="JetBrains Mono"/>
+              </a:rPr>
+              <a:t>or</a:t>
             </a:r>
             <a:r>
               <a:rPr sz="2400" b="0">
@@ -10422,10 +10334,10 @@
                 <a:ea typeface="Calibri"/>
                 <a:cs typeface="Calibri"/>
               </a:rPr>
-              <a:t>; otherwise display </a:t>
-            </a:r>
-            <a:r>
-              <a:rPr sz="2400" b="0">
+              <a:t> operator. Test 12 and </a:t>
+            </a:r>
+            <a:r>
+              <a:rPr sz="2050" b="0">
                 <a:solidFill>
                   <a:srgbClr val="067D17"/>
                 </a:solidFill>
@@ -10433,7 +10345,7 @@
                 <a:ea typeface="JetBrains Mono"/>
                 <a:cs typeface="JetBrains Mono"/>
               </a:rPr>
-              <a:t>"Club entry refused."</a:t>
+              <a:t>"no"</a:t>
             </a:r>
             <a:r>
               <a:rPr sz="2400" b="0">
@@ -10444,10 +10356,10 @@
                 <a:ea typeface="Calibri"/>
                 <a:cs typeface="Calibri"/>
               </a:rPr>
-              <a:t> Test </a:t>
-            </a:r>
-            <a:r>
-              <a:rPr sz="2400" b="0">
+              <a:t>, 20 and </a:t>
+            </a:r>
+            <a:r>
+              <a:rPr sz="2050" b="0">
                 <a:solidFill>
                   <a:srgbClr val="067D17"/>
                 </a:solidFill>
@@ -10466,10 +10378,10 @@
                 <a:ea typeface="Calibri"/>
                 <a:cs typeface="Calibri"/>
               </a:rPr>
-              <a:t> and </a:t>
-            </a:r>
-            <a:r>
-              <a:rPr sz="2400" b="0">
+              <a:t>, then 30 and </a:t>
+            </a:r>
+            <a:r>
+              <a:rPr sz="2050" b="0">
                 <a:solidFill>
                   <a:srgbClr val="067D17"/>
                 </a:solidFill>
@@ -10478,50 +10390,6 @@
                 <a:cs typeface="JetBrains Mono"/>
               </a:rPr>
               <a:t>"yes"</a:t>
-            </a:r>
-            <a:r>
-              <a:rPr sz="2400" b="0">
-                <a:solidFill>
-                  <a:srgbClr val="080808"/>
-                </a:solidFill>
-                <a:latin typeface="Calibri"/>
-                <a:ea typeface="Calibri"/>
-                <a:cs typeface="Calibri"/>
-              </a:rPr>
-              <a:t>, then test </a:t>
-            </a:r>
-            <a:r>
-              <a:rPr sz="2400" b="0">
-                <a:solidFill>
-                  <a:srgbClr val="067D17"/>
-                </a:solidFill>
-                <a:latin typeface="JetBrains Mono"/>
-                <a:ea typeface="JetBrains Mono"/>
-                <a:cs typeface="JetBrains Mono"/>
-              </a:rPr>
-              <a:t>"yes"</a:t>
-            </a:r>
-            <a:r>
-              <a:rPr sz="2400" b="0">
-                <a:solidFill>
-                  <a:srgbClr val="080808"/>
-                </a:solidFill>
-                <a:latin typeface="Calibri"/>
-                <a:ea typeface="Calibri"/>
-                <a:cs typeface="Calibri"/>
-              </a:rPr>
-              <a:t> and </a:t>
-            </a:r>
-            <a:r>
-              <a:rPr sz="2400" b="0">
-                <a:solidFill>
-                  <a:srgbClr val="067D17"/>
-                </a:solidFill>
-                <a:latin typeface="JetBrains Mono"/>
-                <a:ea typeface="JetBrains Mono"/>
-                <a:cs typeface="JetBrains Mono"/>
-              </a:rPr>
-              <a:t>"no"</a:t>
             </a:r>
             <a:r>
               <a:rPr sz="2400" b="0">

--- a/Mapped Curriculum Lessons/Grade 6/Lesson 06 - Logical Choices/Logical Choices - Slides.pptx
+++ b/Mapped Curriculum Lessons/Grade 6/Lesson 06 - Logical Choices/Logical Choices - Slides.pptx
@@ -2,28 +2,28 @@
 <file path=ppt/presentation.xml><?xml version="1.0" encoding="utf-8"?>
 <p:presentation xmlns:p="http://schemas.openxmlformats.org/presentationml/2006/main" embedTrueTypeFonts="1" saveSubsetFonts="0">
   <p:sldMasterIdLst>
-    <p:sldMasterId xmlns:r="http://schemas.openxmlformats.org/officeDocument/2006/relationships" id="2147483648" r:id="Rd451db3c8f5b4f93"/>
+    <p:sldMasterId xmlns:r="http://schemas.openxmlformats.org/officeDocument/2006/relationships" id="2147483648" r:id="R6192feeff5124f73"/>
   </p:sldMasterIdLst>
   <p:notesMasterIdLst>
-    <p:notesMasterId xmlns:r="http://schemas.openxmlformats.org/officeDocument/2006/relationships" r:id="R240788ad4ca642b5"/>
+    <p:notesMasterId xmlns:r="http://schemas.openxmlformats.org/officeDocument/2006/relationships" r:id="R5581b120a37840c8"/>
   </p:notesMasterIdLst>
   <p:sldIdLst>
-    <p:sldId xmlns:r="http://schemas.openxmlformats.org/officeDocument/2006/relationships" id="256" r:id="R7820576b97e54524"/>
-    <p:sldId xmlns:r="http://schemas.openxmlformats.org/officeDocument/2006/relationships" id="257" r:id="R91613058f15746f0"/>
-    <p:sldId xmlns:r="http://schemas.openxmlformats.org/officeDocument/2006/relationships" id="258" r:id="Rdb77711515e34c05"/>
-    <p:sldId xmlns:r="http://schemas.openxmlformats.org/officeDocument/2006/relationships" id="259" r:id="R7c1b5bdf01e14eca"/>
-    <p:sldId xmlns:r="http://schemas.openxmlformats.org/officeDocument/2006/relationships" id="260" r:id="Raa93be10228f4d8b"/>
-    <p:sldId xmlns:r="http://schemas.openxmlformats.org/officeDocument/2006/relationships" id="261" r:id="R13e53c9b9ff94a26"/>
-    <p:sldId xmlns:r="http://schemas.openxmlformats.org/officeDocument/2006/relationships" id="262" r:id="R5658b2a0d27a461d"/>
-    <p:sldId xmlns:r="http://schemas.openxmlformats.org/officeDocument/2006/relationships" id="263" r:id="R8f7b5e2b7ab5424f"/>
-    <p:sldId xmlns:r="http://schemas.openxmlformats.org/officeDocument/2006/relationships" id="264" r:id="R284bc5abcca44813"/>
+    <p:sldId xmlns:r="http://schemas.openxmlformats.org/officeDocument/2006/relationships" id="256" r:id="Ra2fe69308ef54602"/>
+    <p:sldId xmlns:r="http://schemas.openxmlformats.org/officeDocument/2006/relationships" id="257" r:id="R1093f4b590c847b4"/>
+    <p:sldId xmlns:r="http://schemas.openxmlformats.org/officeDocument/2006/relationships" id="258" r:id="R909fddb5c8b145ee"/>
+    <p:sldId xmlns:r="http://schemas.openxmlformats.org/officeDocument/2006/relationships" id="259" r:id="Rbc9101763dd94f87"/>
+    <p:sldId xmlns:r="http://schemas.openxmlformats.org/officeDocument/2006/relationships" id="260" r:id="R98a23984b5b140a7"/>
+    <p:sldId xmlns:r="http://schemas.openxmlformats.org/officeDocument/2006/relationships" id="261" r:id="R44004c4541f44ae8"/>
+    <p:sldId xmlns:r="http://schemas.openxmlformats.org/officeDocument/2006/relationships" id="262" r:id="Rf4d18abf81484d2c"/>
+    <p:sldId xmlns:r="http://schemas.openxmlformats.org/officeDocument/2006/relationships" id="263" r:id="Rd6014ccd2ad04dfd"/>
+    <p:sldId xmlns:r="http://schemas.openxmlformats.org/officeDocument/2006/relationships" id="264" r:id="Rd3b1195fa1064e17"/>
   </p:sldIdLst>
   <p:sldSz cx="12192000" cy="6858000"/>
   <p:notesSz cx="6858000" cy="9144000"/>
   <p:embeddedFontLst>
     <p:embeddedFont>
       <p:font typeface="JetBrains Mono"/>
-      <p:regular xmlns:r="http://schemas.openxmlformats.org/officeDocument/2006/relationships" r:id="R1629863a2b264c2e"/>
+      <p:regular xmlns:r="http://schemas.openxmlformats.org/officeDocument/2006/relationships" r:id="R6e4ed787bb064da8"/>
     </p:embeddedFont>
   </p:embeddedFontLst>
 </p:presentation>
@@ -1071,7 +1071,7 @@
           <p:nvPr/>
         </p:nvPicPr>
         <p:blipFill rotWithShape="1">
-          <a:blip xmlns:r="http://schemas.openxmlformats.org/officeDocument/2006/relationships" xmlns:a="http://schemas.openxmlformats.org/drawingml/2006/main" r:embed="R2f5cf422e3584b11"/>
+          <a:blip xmlns:r="http://schemas.openxmlformats.org/officeDocument/2006/relationships" xmlns:a="http://schemas.openxmlformats.org/drawingml/2006/main" r:embed="R55e3d771101b4039"/>
           <a:stretch xmlns:a="http://schemas.openxmlformats.org/drawingml/2006/main"/>
         </p:blipFill>
         <p:spPr>
@@ -1451,7 +1451,7 @@
           <p:nvPr/>
         </p:nvPicPr>
         <p:blipFill rotWithShape="1">
-          <a:blip xmlns:r="http://schemas.openxmlformats.org/officeDocument/2006/relationships" xmlns:a="http://schemas.openxmlformats.org/drawingml/2006/main" r:embed="R0682152df7bf4d96">
+          <a:blip xmlns:r="http://schemas.openxmlformats.org/officeDocument/2006/relationships" xmlns:a="http://schemas.openxmlformats.org/drawingml/2006/main" r:embed="Rb6435bf04b414a95">
             <a:alphaModFix amt="28000"/>
           </a:blip>
           <a:stretch xmlns:a="http://schemas.openxmlformats.org/drawingml/2006/main"/>
@@ -1664,7 +1664,7 @@
           <p:nvPr/>
         </p:nvPicPr>
         <p:blipFill rotWithShape="1">
-          <a:blip xmlns:r="http://schemas.openxmlformats.org/officeDocument/2006/relationships" xmlns:a="http://schemas.openxmlformats.org/drawingml/2006/main" r:embed="R02816fcf3ca44271">
+          <a:blip xmlns:r="http://schemas.openxmlformats.org/officeDocument/2006/relationships" xmlns:a="http://schemas.openxmlformats.org/drawingml/2006/main" r:embed="R9cf84d4f800148f0">
             <a:alphaModFix amt="28000"/>
           </a:blip>
           <a:stretch xmlns:a="http://schemas.openxmlformats.org/drawingml/2006/main"/>
@@ -1899,7 +1899,7 @@
           <p:nvPr/>
         </p:nvPicPr>
         <p:blipFill rotWithShape="1">
-          <a:blip xmlns:r="http://schemas.openxmlformats.org/officeDocument/2006/relationships" xmlns:a="http://schemas.openxmlformats.org/drawingml/2006/main" r:embed="Rc850d6bc828748c5">
+          <a:blip xmlns:r="http://schemas.openxmlformats.org/officeDocument/2006/relationships" xmlns:a="http://schemas.openxmlformats.org/drawingml/2006/main" r:embed="R2f6cf0801d674062">
             <a:alphaModFix amt="28000"/>
           </a:blip>
           <a:stretch xmlns:a="http://schemas.openxmlformats.org/drawingml/2006/main"/>
@@ -2176,7 +2176,7 @@
           <p:nvPr/>
         </p:nvPicPr>
         <p:blipFill rotWithShape="1">
-          <a:blip xmlns:r="http://schemas.openxmlformats.org/officeDocument/2006/relationships" xmlns:a="http://schemas.openxmlformats.org/drawingml/2006/main" r:embed="Rca7735065cf0480b">
+          <a:blip xmlns:r="http://schemas.openxmlformats.org/officeDocument/2006/relationships" xmlns:a="http://schemas.openxmlformats.org/drawingml/2006/main" r:embed="R9725c542b6b74ced">
             <a:alphaModFix amt="28000"/>
           </a:blip>
           <a:stretch xmlns:a="http://schemas.openxmlformats.org/drawingml/2006/main"/>
@@ -2451,7 +2451,7 @@
           <p:nvPr/>
         </p:nvPicPr>
         <p:blipFill rotWithShape="1">
-          <a:blip xmlns:r="http://schemas.openxmlformats.org/officeDocument/2006/relationships" xmlns:a="http://schemas.openxmlformats.org/drawingml/2006/main" r:embed="Raf0ff1e2774741b3">
+          <a:blip xmlns:r="http://schemas.openxmlformats.org/officeDocument/2006/relationships" xmlns:a="http://schemas.openxmlformats.org/drawingml/2006/main" r:embed="R62bee73dee4a4c76">
             <a:alphaModFix amt="28000"/>
           </a:blip>
           <a:stretch xmlns:a="http://schemas.openxmlformats.org/drawingml/2006/main"/>
@@ -2875,7 +2875,7 @@
           <p:nvPr/>
         </p:nvPicPr>
         <p:blipFill rotWithShape="1">
-          <a:blip xmlns:r="http://schemas.openxmlformats.org/officeDocument/2006/relationships" xmlns:a="http://schemas.openxmlformats.org/drawingml/2006/main" r:embed="R48d93bb476f04286">
+          <a:blip xmlns:r="http://schemas.openxmlformats.org/officeDocument/2006/relationships" xmlns:a="http://schemas.openxmlformats.org/drawingml/2006/main" r:embed="Rad1666af01504e75">
             <a:alphaModFix amt="28000"/>
           </a:blip>
           <a:stretch xmlns:a="http://schemas.openxmlformats.org/drawingml/2006/main"/>
@@ -3016,7 +3016,7 @@
           <p:nvPr/>
         </p:nvPicPr>
         <p:blipFill rotWithShape="1">
-          <a:blip xmlns:r="http://schemas.openxmlformats.org/officeDocument/2006/relationships" xmlns:a="http://schemas.openxmlformats.org/drawingml/2006/main" r:embed="Rbcfcdbcf59c94a5e">
+          <a:blip xmlns:r="http://schemas.openxmlformats.org/officeDocument/2006/relationships" xmlns:a="http://schemas.openxmlformats.org/drawingml/2006/main" r:embed="R5e1ee433fa764b0e">
             <a:alphaModFix amt="28000"/>
           </a:blip>
           <a:stretch xmlns:a="http://schemas.openxmlformats.org/drawingml/2006/main"/>
@@ -3130,7 +3130,7 @@
           <p:nvPr/>
         </p:nvPicPr>
         <p:blipFill rotWithShape="1">
-          <a:blip xmlns:r="http://schemas.openxmlformats.org/officeDocument/2006/relationships" xmlns:a="http://schemas.openxmlformats.org/drawingml/2006/main" r:embed="Rae81f2ae596e416b">
+          <a:blip xmlns:r="http://schemas.openxmlformats.org/officeDocument/2006/relationships" xmlns:a="http://schemas.openxmlformats.org/drawingml/2006/main" r:embed="R5ef88686b0164c2a">
             <a:alphaModFix amt="28000"/>
           </a:blip>
           <a:stretch xmlns:a="http://schemas.openxmlformats.org/drawingml/2006/main"/>
@@ -3457,7 +3457,7 @@
           <p:nvPr/>
         </p:nvPicPr>
         <p:blipFill rotWithShape="1">
-          <a:blip xmlns:r="http://schemas.openxmlformats.org/officeDocument/2006/relationships" xmlns:a="http://schemas.openxmlformats.org/drawingml/2006/main" r:embed="R207ddb4228c84a15">
+          <a:blip xmlns:r="http://schemas.openxmlformats.org/officeDocument/2006/relationships" xmlns:a="http://schemas.openxmlformats.org/drawingml/2006/main" r:embed="Rda47c0ac0a174d0c">
             <a:alphaModFix amt="28000"/>
           </a:blip>
           <a:stretch xmlns:a="http://schemas.openxmlformats.org/drawingml/2006/main"/>
@@ -3745,7 +3745,7 @@
           <p:nvPr/>
         </p:nvPicPr>
         <p:blipFill rotWithShape="1">
-          <a:blip xmlns:r="http://schemas.openxmlformats.org/officeDocument/2006/relationships" xmlns:a="http://schemas.openxmlformats.org/drawingml/2006/main" r:embed="R3e3a4c1f096147b1">
+          <a:blip xmlns:r="http://schemas.openxmlformats.org/officeDocument/2006/relationships" xmlns:a="http://schemas.openxmlformats.org/drawingml/2006/main" r:embed="R13d71dcb7d064988">
             <a:alphaModFix amt="28000"/>
           </a:blip>
           <a:stretch xmlns:a="http://schemas.openxmlformats.org/drawingml/2006/main"/>
@@ -3982,17 +3982,17 @@
   </p:cSld>
   <p:clrMap bg1="lt1" tx1="dk1" bg2="lt2" tx2="dk2" accent1="accent1" accent2="accent2" accent3="accent3" accent4="accent4" accent5="accent5" accent6="accent6" hlink="hlink" folHlink="folHlink"/>
   <p:sldLayoutIdLst>
-    <p:sldLayoutId xmlns:r="http://schemas.openxmlformats.org/officeDocument/2006/relationships" id="2147483649" r:id="R82850e9fa680439e"/>
-    <p:sldLayoutId xmlns:r="http://schemas.openxmlformats.org/officeDocument/2006/relationships" id="2147483650" r:id="R6b36e095515e4179"/>
-    <p:sldLayoutId xmlns:r="http://schemas.openxmlformats.org/officeDocument/2006/relationships" id="2147483651" r:id="R431a891ca0404568"/>
-    <p:sldLayoutId xmlns:r="http://schemas.openxmlformats.org/officeDocument/2006/relationships" id="2147483652" r:id="R4d414062e1c242b3"/>
-    <p:sldLayoutId xmlns:r="http://schemas.openxmlformats.org/officeDocument/2006/relationships" id="2147483653" r:id="R6614776dffdc454f"/>
-    <p:sldLayoutId xmlns:r="http://schemas.openxmlformats.org/officeDocument/2006/relationships" id="2147483654" r:id="Rb77f125e4e2c4bc2"/>
-    <p:sldLayoutId xmlns:r="http://schemas.openxmlformats.org/officeDocument/2006/relationships" id="2147483655" r:id="R5872f28dbe174223"/>
-    <p:sldLayoutId xmlns:r="http://schemas.openxmlformats.org/officeDocument/2006/relationships" id="2147483656" r:id="Re346244f21094c6b"/>
-    <p:sldLayoutId xmlns:r="http://schemas.openxmlformats.org/officeDocument/2006/relationships" id="2147483657" r:id="R1418bdb4c9c54011"/>
-    <p:sldLayoutId xmlns:r="http://schemas.openxmlformats.org/officeDocument/2006/relationships" id="2147483658" r:id="Ra726c52fca034ee8"/>
-    <p:sldLayoutId xmlns:r="http://schemas.openxmlformats.org/officeDocument/2006/relationships" id="2147483659" r:id="R1b524a13b60f422f"/>
+    <p:sldLayoutId xmlns:r="http://schemas.openxmlformats.org/officeDocument/2006/relationships" id="2147483649" r:id="R58a2bdd671e144ba"/>
+    <p:sldLayoutId xmlns:r="http://schemas.openxmlformats.org/officeDocument/2006/relationships" id="2147483650" r:id="Rf8f76c146ed14992"/>
+    <p:sldLayoutId xmlns:r="http://schemas.openxmlformats.org/officeDocument/2006/relationships" id="2147483651" r:id="R758dd976a8d74d49"/>
+    <p:sldLayoutId xmlns:r="http://schemas.openxmlformats.org/officeDocument/2006/relationships" id="2147483652" r:id="R34197401a2464592"/>
+    <p:sldLayoutId xmlns:r="http://schemas.openxmlformats.org/officeDocument/2006/relationships" id="2147483653" r:id="Ra0033bce88204f0e"/>
+    <p:sldLayoutId xmlns:r="http://schemas.openxmlformats.org/officeDocument/2006/relationships" id="2147483654" r:id="R293967cf84f14c32"/>
+    <p:sldLayoutId xmlns:r="http://schemas.openxmlformats.org/officeDocument/2006/relationships" id="2147483655" r:id="R870a74e4236a49ac"/>
+    <p:sldLayoutId xmlns:r="http://schemas.openxmlformats.org/officeDocument/2006/relationships" id="2147483656" r:id="R9ec3dd3db635456e"/>
+    <p:sldLayoutId xmlns:r="http://schemas.openxmlformats.org/officeDocument/2006/relationships" id="2147483657" r:id="R97e6334bf607417c"/>
+    <p:sldLayoutId xmlns:r="http://schemas.openxmlformats.org/officeDocument/2006/relationships" id="2147483658" r:id="R3f12de862800418c"/>
+    <p:sldLayoutId xmlns:r="http://schemas.openxmlformats.org/officeDocument/2006/relationships" id="2147483659" r:id="Rd8fb7be23bf74edc"/>
   </p:sldLayoutIdLst>
   <p:hf hdr="0" ftr="0" dt="0"/>
   <p:txStyles>
@@ -5109,7 +5109,7 @@
             <a:r>
               <a:rPr sz="2400">
                 <a:solidFill>
-                  <a:srgbClr val="1750EB"/>
+                  <a:srgbClr val="C45E00"/>
                 </a:solidFill>
                 <a:latin typeface="JetBrains Mono"/>
                 <a:ea typeface="JetBrains Mono"/>
@@ -5153,7 +5153,7 @@
             <a:r>
               <a:rPr sz="2400">
                 <a:solidFill>
-                  <a:srgbClr val="1750EB"/>
+                  <a:srgbClr val="C45E00"/>
                 </a:solidFill>
                 <a:latin typeface="JetBrains Mono"/>
                 <a:ea typeface="JetBrains Mono"/>
@@ -5219,7 +5219,7 @@
             <a:r>
               <a:rPr sz="2400">
                 <a:solidFill>
-                  <a:srgbClr val="1750EB"/>
+                  <a:srgbClr val="C45E00"/>
                 </a:solidFill>
                 <a:latin typeface="JetBrains Mono"/>
                 <a:ea typeface="JetBrains Mono"/>
@@ -5356,7 +5356,7 @@
             <a:r>
               <a:rPr sz="2400">
                 <a:solidFill>
-                  <a:srgbClr val="1750EB"/>
+                  <a:srgbClr val="C45E00"/>
                 </a:solidFill>
                 <a:latin typeface="JetBrains Mono"/>
                 <a:ea typeface="JetBrains Mono"/>
@@ -5937,7 +5937,7 @@
             <a:r>
               <a:rPr sz="2400">
                 <a:solidFill>
-                  <a:srgbClr val="1750EB"/>
+                  <a:srgbClr val="C45E00"/>
                 </a:solidFill>
                 <a:latin typeface="JetBrains Mono"/>
                 <a:ea typeface="JetBrains Mono"/>
@@ -5981,7 +5981,7 @@
             <a:r>
               <a:rPr sz="2400">
                 <a:solidFill>
-                  <a:srgbClr val="1750EB"/>
+                  <a:srgbClr val="C45E00"/>
                 </a:solidFill>
                 <a:latin typeface="JetBrains Mono"/>
                 <a:ea typeface="JetBrains Mono"/>
@@ -6047,7 +6047,7 @@
             <a:r>
               <a:rPr sz="2400">
                 <a:solidFill>
-                  <a:srgbClr val="1750EB"/>
+                  <a:srgbClr val="C45E00"/>
                 </a:solidFill>
                 <a:latin typeface="JetBrains Mono"/>
                 <a:ea typeface="JetBrains Mono"/>
@@ -6184,7 +6184,7 @@
             <a:r>
               <a:rPr sz="2400">
                 <a:solidFill>
-                  <a:srgbClr val="1750EB"/>
+                  <a:srgbClr val="C45E00"/>
                 </a:solidFill>
                 <a:latin typeface="JetBrains Mono"/>
                 <a:ea typeface="JetBrains Mono"/>
@@ -6765,7 +6765,7 @@
             <a:r>
               <a:rPr sz="2400">
                 <a:solidFill>
-                  <a:srgbClr val="1750EB"/>
+                  <a:srgbClr val="C45E00"/>
                 </a:solidFill>
                 <a:latin typeface="JetBrains Mono"/>
                 <a:ea typeface="JetBrains Mono"/>
@@ -6809,7 +6809,7 @@
             <a:r>
               <a:rPr sz="2400">
                 <a:solidFill>
-                  <a:srgbClr val="1750EB"/>
+                  <a:srgbClr val="C45E00"/>
                 </a:solidFill>
                 <a:latin typeface="JetBrains Mono"/>
                 <a:ea typeface="JetBrains Mono"/>
@@ -6875,7 +6875,7 @@
             <a:r>
               <a:rPr sz="2400">
                 <a:solidFill>
-                  <a:srgbClr val="1750EB"/>
+                  <a:srgbClr val="C45E00"/>
                 </a:solidFill>
                 <a:latin typeface="JetBrains Mono"/>
                 <a:ea typeface="JetBrains Mono"/>
@@ -7012,7 +7012,7 @@
             <a:r>
               <a:rPr sz="2400">
                 <a:solidFill>
-                  <a:srgbClr val="1750EB"/>
+                  <a:srgbClr val="C45E00"/>
                 </a:solidFill>
                 <a:latin typeface="JetBrains Mono"/>
                 <a:ea typeface="JetBrains Mono"/>
@@ -7850,7 +7850,7 @@
             <a:r>
               <a:rPr sz="1400">
                 <a:solidFill>
-                  <a:srgbClr val="1750EB"/>
+                  <a:srgbClr val="C45E00"/>
                 </a:solidFill>
                 <a:latin typeface="JetBrains Mono"/>
                 <a:ea typeface="JetBrains Mono"/>
@@ -7894,7 +7894,7 @@
             <a:r>
               <a:rPr sz="1400">
                 <a:solidFill>
-                  <a:srgbClr val="1750EB"/>
+                  <a:srgbClr val="C45E00"/>
                 </a:solidFill>
                 <a:latin typeface="JetBrains Mono"/>
                 <a:ea typeface="JetBrains Mono"/>
@@ -7960,7 +7960,7 @@
             <a:r>
               <a:rPr sz="1400">
                 <a:solidFill>
-                  <a:srgbClr val="1750EB"/>
+                  <a:srgbClr val="C45E00"/>
                 </a:solidFill>
                 <a:latin typeface="JetBrains Mono"/>
                 <a:ea typeface="JetBrains Mono"/>
@@ -8101,7 +8101,7 @@
             <a:r>
               <a:rPr sz="1400">
                 <a:solidFill>
-                  <a:srgbClr val="1750EB"/>
+                  <a:srgbClr val="C45E00"/>
                 </a:solidFill>
                 <a:latin typeface="JetBrains Mono"/>
                 <a:ea typeface="JetBrains Mono"/>
@@ -8292,7 +8292,7 @@
             <a:r>
               <a:rPr sz="2050" b="0">
                 <a:solidFill>
-                  <a:srgbClr val="1750EB"/>
+                  <a:srgbClr val="C45E00"/>
                 </a:solidFill>
                 <a:latin typeface="JetBrains Mono"/>
                 <a:ea typeface="JetBrains Mono"/>
@@ -8824,7 +8824,7 @@
             <a:r>
               <a:rPr sz="1400">
                 <a:solidFill>
-                  <a:srgbClr val="1750EB"/>
+                  <a:srgbClr val="C45E00"/>
                 </a:solidFill>
                 <a:latin typeface="JetBrains Mono"/>
                 <a:ea typeface="JetBrains Mono"/>
@@ -8868,7 +8868,7 @@
             <a:r>
               <a:rPr sz="1400">
                 <a:solidFill>
-                  <a:srgbClr val="1750EB"/>
+                  <a:srgbClr val="C45E00"/>
                 </a:solidFill>
                 <a:latin typeface="JetBrains Mono"/>
                 <a:ea typeface="JetBrains Mono"/>
@@ -8934,7 +8934,7 @@
             <a:r>
               <a:rPr sz="1400">
                 <a:solidFill>
-                  <a:srgbClr val="1750EB"/>
+                  <a:srgbClr val="C45E00"/>
                 </a:solidFill>
                 <a:latin typeface="JetBrains Mono"/>
                 <a:ea typeface="JetBrains Mono"/>
@@ -9075,7 +9075,7 @@
             <a:r>
               <a:rPr sz="1400">
                 <a:solidFill>
-                  <a:srgbClr val="1750EB"/>
+                  <a:srgbClr val="C45E00"/>
                 </a:solidFill>
                 <a:latin typeface="JetBrains Mono"/>
                 <a:ea typeface="JetBrains Mono"/>
@@ -9266,7 +9266,7 @@
             <a:r>
               <a:rPr sz="2050" b="0">
                 <a:solidFill>
-                  <a:srgbClr val="1750EB"/>
+                  <a:srgbClr val="C45E00"/>
                 </a:solidFill>
                 <a:latin typeface="JetBrains Mono"/>
                 <a:ea typeface="JetBrains Mono"/>
@@ -9288,7 +9288,7 @@
             <a:r>
               <a:rPr sz="2050" b="0">
                 <a:solidFill>
-                  <a:srgbClr val="1750EB"/>
+                  <a:srgbClr val="C45E00"/>
                 </a:solidFill>
                 <a:latin typeface="JetBrains Mono"/>
                 <a:ea typeface="JetBrains Mono"/>
@@ -9809,7 +9809,7 @@
             <a:r>
               <a:rPr sz="1400">
                 <a:solidFill>
-                  <a:srgbClr val="1750EB"/>
+                  <a:srgbClr val="C45E00"/>
                 </a:solidFill>
                 <a:latin typeface="JetBrains Mono"/>
                 <a:ea typeface="JetBrains Mono"/>
@@ -9853,7 +9853,7 @@
             <a:r>
               <a:rPr sz="1400">
                 <a:solidFill>
-                  <a:srgbClr val="1750EB"/>
+                  <a:srgbClr val="C45E00"/>
                 </a:solidFill>
                 <a:latin typeface="JetBrains Mono"/>
                 <a:ea typeface="JetBrains Mono"/>
@@ -9919,7 +9919,7 @@
             <a:r>
               <a:rPr sz="1400">
                 <a:solidFill>
-                  <a:srgbClr val="1750EB"/>
+                  <a:srgbClr val="C45E00"/>
                 </a:solidFill>
                 <a:latin typeface="JetBrains Mono"/>
                 <a:ea typeface="JetBrains Mono"/>
@@ -10060,7 +10060,7 @@
             <a:r>
               <a:rPr sz="1400">
                 <a:solidFill>
-                  <a:srgbClr val="1750EB"/>
+                  <a:srgbClr val="C45E00"/>
                 </a:solidFill>
                 <a:latin typeface="JetBrains Mono"/>
                 <a:ea typeface="JetBrains Mono"/>
@@ -10295,7 +10295,7 @@
             <a:r>
               <a:rPr sz="2050" b="0">
                 <a:solidFill>
-                  <a:srgbClr val="1750EB"/>
+                  <a:srgbClr val="C45E00"/>
                 </a:solidFill>
                 <a:latin typeface="JetBrains Mono"/>
                 <a:ea typeface="JetBrains Mono"/>
@@ -10317,7 +10317,7 @@
             <a:r>
               <a:rPr sz="2050" b="0">
                 <a:solidFill>
-                  <a:srgbClr val="1750EB"/>
+                  <a:srgbClr val="C45E00"/>
                 </a:solidFill>
                 <a:latin typeface="JetBrains Mono"/>
                 <a:ea typeface="JetBrains Mono"/>
@@ -10893,7 +10893,7 @@
             <a:r>
               <a:rPr sz="1400">
                 <a:solidFill>
-                  <a:srgbClr val="1750EB"/>
+                  <a:srgbClr val="C45E00"/>
                 </a:solidFill>
                 <a:latin typeface="JetBrains Mono"/>
                 <a:ea typeface="JetBrains Mono"/>
@@ -10937,7 +10937,7 @@
             <a:r>
               <a:rPr sz="1400">
                 <a:solidFill>
-                  <a:srgbClr val="1750EB"/>
+                  <a:srgbClr val="C45E00"/>
                 </a:solidFill>
                 <a:latin typeface="JetBrains Mono"/>
                 <a:ea typeface="JetBrains Mono"/>
@@ -11003,7 +11003,7 @@
             <a:r>
               <a:rPr sz="1400">
                 <a:solidFill>
-                  <a:srgbClr val="1750EB"/>
+                  <a:srgbClr val="C45E00"/>
                 </a:solidFill>
                 <a:latin typeface="JetBrains Mono"/>
                 <a:ea typeface="JetBrains Mono"/>
@@ -11144,7 +11144,7 @@
             <a:r>
               <a:rPr sz="1400">
                 <a:solidFill>
-                  <a:srgbClr val="1750EB"/>
+                  <a:srgbClr val="C45E00"/>
                 </a:solidFill>
                 <a:latin typeface="JetBrains Mono"/>
                 <a:ea typeface="JetBrains Mono"/>
@@ -11575,7 +11575,7 @@
             <a:r>
               <a:rPr sz="1800">
                 <a:solidFill>
-                  <a:srgbClr val="1750EB"/>
+                  <a:srgbClr val="C45E00"/>
                 </a:solidFill>
                 <a:latin typeface="JetBrains Mono"/>
                 <a:ea typeface="JetBrains Mono"/>
@@ -11619,7 +11619,7 @@
             <a:r>
               <a:rPr sz="1800">
                 <a:solidFill>
-                  <a:srgbClr val="1750EB"/>
+                  <a:srgbClr val="C45E00"/>
                 </a:solidFill>
                 <a:latin typeface="JetBrains Mono"/>
                 <a:ea typeface="JetBrains Mono"/>
@@ -11685,7 +11685,7 @@
             <a:r>
               <a:rPr sz="1800">
                 <a:solidFill>
-                  <a:srgbClr val="1750EB"/>
+                  <a:srgbClr val="C45E00"/>
                 </a:solidFill>
                 <a:latin typeface="JetBrains Mono"/>
                 <a:ea typeface="JetBrains Mono"/>
@@ -11822,7 +11822,7 @@
             <a:r>
               <a:rPr sz="1800">
                 <a:solidFill>
-                  <a:srgbClr val="1750EB"/>
+                  <a:srgbClr val="C45E00"/>
                 </a:solidFill>
                 <a:latin typeface="JetBrains Mono"/>
                 <a:ea typeface="JetBrains Mono"/>

--- a/Mapped Curriculum Lessons/Grade 6/Lesson 06 - Logical Choices/Logical Choices - Slides.pptx
+++ b/Mapped Curriculum Lessons/Grade 6/Lesson 06 - Logical Choices/Logical Choices - Slides.pptx
@@ -2,28 +2,28 @@
 <file path=ppt/presentation.xml><?xml version="1.0" encoding="utf-8"?>
 <p:presentation xmlns:p="http://schemas.openxmlformats.org/presentationml/2006/main" embedTrueTypeFonts="1" saveSubsetFonts="0">
   <p:sldMasterIdLst>
-    <p:sldMasterId xmlns:r="http://schemas.openxmlformats.org/officeDocument/2006/relationships" id="2147483648" r:id="R6192feeff5124f73"/>
+    <p:sldMasterId xmlns:r="http://schemas.openxmlformats.org/officeDocument/2006/relationships" id="2147483648" r:id="Rd410ac09017049b4"/>
   </p:sldMasterIdLst>
   <p:notesMasterIdLst>
-    <p:notesMasterId xmlns:r="http://schemas.openxmlformats.org/officeDocument/2006/relationships" r:id="R5581b120a37840c8"/>
+    <p:notesMasterId xmlns:r="http://schemas.openxmlformats.org/officeDocument/2006/relationships" r:id="Rfcee7ed52f3b4403"/>
   </p:notesMasterIdLst>
   <p:sldIdLst>
-    <p:sldId xmlns:r="http://schemas.openxmlformats.org/officeDocument/2006/relationships" id="256" r:id="Ra2fe69308ef54602"/>
-    <p:sldId xmlns:r="http://schemas.openxmlformats.org/officeDocument/2006/relationships" id="257" r:id="R1093f4b590c847b4"/>
-    <p:sldId xmlns:r="http://schemas.openxmlformats.org/officeDocument/2006/relationships" id="258" r:id="R909fddb5c8b145ee"/>
-    <p:sldId xmlns:r="http://schemas.openxmlformats.org/officeDocument/2006/relationships" id="259" r:id="Rbc9101763dd94f87"/>
-    <p:sldId xmlns:r="http://schemas.openxmlformats.org/officeDocument/2006/relationships" id="260" r:id="R98a23984b5b140a7"/>
-    <p:sldId xmlns:r="http://schemas.openxmlformats.org/officeDocument/2006/relationships" id="261" r:id="R44004c4541f44ae8"/>
-    <p:sldId xmlns:r="http://schemas.openxmlformats.org/officeDocument/2006/relationships" id="262" r:id="Rf4d18abf81484d2c"/>
-    <p:sldId xmlns:r="http://schemas.openxmlformats.org/officeDocument/2006/relationships" id="263" r:id="Rd6014ccd2ad04dfd"/>
-    <p:sldId xmlns:r="http://schemas.openxmlformats.org/officeDocument/2006/relationships" id="264" r:id="Rd3b1195fa1064e17"/>
+    <p:sldId xmlns:r="http://schemas.openxmlformats.org/officeDocument/2006/relationships" id="256" r:id="R1504f588b2d44137"/>
+    <p:sldId xmlns:r="http://schemas.openxmlformats.org/officeDocument/2006/relationships" id="257" r:id="Rbbb87918af704ecc"/>
+    <p:sldId xmlns:r="http://schemas.openxmlformats.org/officeDocument/2006/relationships" id="258" r:id="Rd1e64b62d0674375"/>
+    <p:sldId xmlns:r="http://schemas.openxmlformats.org/officeDocument/2006/relationships" id="259" r:id="R3b9bbd3008ec46c7"/>
+    <p:sldId xmlns:r="http://schemas.openxmlformats.org/officeDocument/2006/relationships" id="260" r:id="R4b5a1cfd59c94353"/>
+    <p:sldId xmlns:r="http://schemas.openxmlformats.org/officeDocument/2006/relationships" id="261" r:id="Rd00e6e63fe364228"/>
+    <p:sldId xmlns:r="http://schemas.openxmlformats.org/officeDocument/2006/relationships" id="262" r:id="R13d00109a9e34e78"/>
+    <p:sldId xmlns:r="http://schemas.openxmlformats.org/officeDocument/2006/relationships" id="263" r:id="Ra745d5a16d1447ae"/>
+    <p:sldId xmlns:r="http://schemas.openxmlformats.org/officeDocument/2006/relationships" id="264" r:id="Rafc190c3f87c45a2"/>
   </p:sldIdLst>
   <p:sldSz cx="12192000" cy="6858000"/>
   <p:notesSz cx="6858000" cy="9144000"/>
   <p:embeddedFontLst>
     <p:embeddedFont>
       <p:font typeface="JetBrains Mono"/>
-      <p:regular xmlns:r="http://schemas.openxmlformats.org/officeDocument/2006/relationships" r:id="R6e4ed787bb064da8"/>
+      <p:regular xmlns:r="http://schemas.openxmlformats.org/officeDocument/2006/relationships" r:id="Rd3658f11d2eb4d81"/>
     </p:embeddedFont>
   </p:embeddedFontLst>
 </p:presentation>
@@ -1071,7 +1071,7 @@
           <p:nvPr/>
         </p:nvPicPr>
         <p:blipFill rotWithShape="1">
-          <a:blip xmlns:r="http://schemas.openxmlformats.org/officeDocument/2006/relationships" xmlns:a="http://schemas.openxmlformats.org/drawingml/2006/main" r:embed="R55e3d771101b4039"/>
+          <a:blip xmlns:r="http://schemas.openxmlformats.org/officeDocument/2006/relationships" xmlns:a="http://schemas.openxmlformats.org/drawingml/2006/main" r:embed="R3a274a3161654198"/>
           <a:stretch xmlns:a="http://schemas.openxmlformats.org/drawingml/2006/main"/>
         </p:blipFill>
         <p:spPr>
@@ -1451,7 +1451,7 @@
           <p:nvPr/>
         </p:nvPicPr>
         <p:blipFill rotWithShape="1">
-          <a:blip xmlns:r="http://schemas.openxmlformats.org/officeDocument/2006/relationships" xmlns:a="http://schemas.openxmlformats.org/drawingml/2006/main" r:embed="Rb6435bf04b414a95">
+          <a:blip xmlns:r="http://schemas.openxmlformats.org/officeDocument/2006/relationships" xmlns:a="http://schemas.openxmlformats.org/drawingml/2006/main" r:embed="R6fd341862394408a">
             <a:alphaModFix amt="28000"/>
           </a:blip>
           <a:stretch xmlns:a="http://schemas.openxmlformats.org/drawingml/2006/main"/>
@@ -1664,7 +1664,7 @@
           <p:nvPr/>
         </p:nvPicPr>
         <p:blipFill rotWithShape="1">
-          <a:blip xmlns:r="http://schemas.openxmlformats.org/officeDocument/2006/relationships" xmlns:a="http://schemas.openxmlformats.org/drawingml/2006/main" r:embed="R9cf84d4f800148f0">
+          <a:blip xmlns:r="http://schemas.openxmlformats.org/officeDocument/2006/relationships" xmlns:a="http://schemas.openxmlformats.org/drawingml/2006/main" r:embed="R715c2b11606a494c">
             <a:alphaModFix amt="28000"/>
           </a:blip>
           <a:stretch xmlns:a="http://schemas.openxmlformats.org/drawingml/2006/main"/>
@@ -1899,7 +1899,7 @@
           <p:nvPr/>
         </p:nvPicPr>
         <p:blipFill rotWithShape="1">
-          <a:blip xmlns:r="http://schemas.openxmlformats.org/officeDocument/2006/relationships" xmlns:a="http://schemas.openxmlformats.org/drawingml/2006/main" r:embed="R2f6cf0801d674062">
+          <a:blip xmlns:r="http://schemas.openxmlformats.org/officeDocument/2006/relationships" xmlns:a="http://schemas.openxmlformats.org/drawingml/2006/main" r:embed="R48baa457727a4dfd">
             <a:alphaModFix amt="28000"/>
           </a:blip>
           <a:stretch xmlns:a="http://schemas.openxmlformats.org/drawingml/2006/main"/>
@@ -2176,7 +2176,7 @@
           <p:nvPr/>
         </p:nvPicPr>
         <p:blipFill rotWithShape="1">
-          <a:blip xmlns:r="http://schemas.openxmlformats.org/officeDocument/2006/relationships" xmlns:a="http://schemas.openxmlformats.org/drawingml/2006/main" r:embed="R9725c542b6b74ced">
+          <a:blip xmlns:r="http://schemas.openxmlformats.org/officeDocument/2006/relationships" xmlns:a="http://schemas.openxmlformats.org/drawingml/2006/main" r:embed="Re2dfde228bb8406a">
             <a:alphaModFix amt="28000"/>
           </a:blip>
           <a:stretch xmlns:a="http://schemas.openxmlformats.org/drawingml/2006/main"/>
@@ -2451,7 +2451,7 @@
           <p:nvPr/>
         </p:nvPicPr>
         <p:blipFill rotWithShape="1">
-          <a:blip xmlns:r="http://schemas.openxmlformats.org/officeDocument/2006/relationships" xmlns:a="http://schemas.openxmlformats.org/drawingml/2006/main" r:embed="R62bee73dee4a4c76">
+          <a:blip xmlns:r="http://schemas.openxmlformats.org/officeDocument/2006/relationships" xmlns:a="http://schemas.openxmlformats.org/drawingml/2006/main" r:embed="R81784ec8e4134d18">
             <a:alphaModFix amt="28000"/>
           </a:blip>
           <a:stretch xmlns:a="http://schemas.openxmlformats.org/drawingml/2006/main"/>
@@ -2875,7 +2875,7 @@
           <p:nvPr/>
         </p:nvPicPr>
         <p:blipFill rotWithShape="1">
-          <a:blip xmlns:r="http://schemas.openxmlformats.org/officeDocument/2006/relationships" xmlns:a="http://schemas.openxmlformats.org/drawingml/2006/main" r:embed="Rad1666af01504e75">
+          <a:blip xmlns:r="http://schemas.openxmlformats.org/officeDocument/2006/relationships" xmlns:a="http://schemas.openxmlformats.org/drawingml/2006/main" r:embed="R53096c5e97654051">
             <a:alphaModFix amt="28000"/>
           </a:blip>
           <a:stretch xmlns:a="http://schemas.openxmlformats.org/drawingml/2006/main"/>
@@ -3016,7 +3016,7 @@
           <p:nvPr/>
         </p:nvPicPr>
         <p:blipFill rotWithShape="1">
-          <a:blip xmlns:r="http://schemas.openxmlformats.org/officeDocument/2006/relationships" xmlns:a="http://schemas.openxmlformats.org/drawingml/2006/main" r:embed="R5e1ee433fa764b0e">
+          <a:blip xmlns:r="http://schemas.openxmlformats.org/officeDocument/2006/relationships" xmlns:a="http://schemas.openxmlformats.org/drawingml/2006/main" r:embed="R5ce281a198df4043">
             <a:alphaModFix amt="28000"/>
           </a:blip>
           <a:stretch xmlns:a="http://schemas.openxmlformats.org/drawingml/2006/main"/>
@@ -3130,7 +3130,7 @@
           <p:nvPr/>
         </p:nvPicPr>
         <p:blipFill rotWithShape="1">
-          <a:blip xmlns:r="http://schemas.openxmlformats.org/officeDocument/2006/relationships" xmlns:a="http://schemas.openxmlformats.org/drawingml/2006/main" r:embed="R5ef88686b0164c2a">
+          <a:blip xmlns:r="http://schemas.openxmlformats.org/officeDocument/2006/relationships" xmlns:a="http://schemas.openxmlformats.org/drawingml/2006/main" r:embed="R47acbd2593134d6e">
             <a:alphaModFix amt="28000"/>
           </a:blip>
           <a:stretch xmlns:a="http://schemas.openxmlformats.org/drawingml/2006/main"/>
@@ -3457,7 +3457,7 @@
           <p:nvPr/>
         </p:nvPicPr>
         <p:blipFill rotWithShape="1">
-          <a:blip xmlns:r="http://schemas.openxmlformats.org/officeDocument/2006/relationships" xmlns:a="http://schemas.openxmlformats.org/drawingml/2006/main" r:embed="Rda47c0ac0a174d0c">
+          <a:blip xmlns:r="http://schemas.openxmlformats.org/officeDocument/2006/relationships" xmlns:a="http://schemas.openxmlformats.org/drawingml/2006/main" r:embed="R4cbfe6cb97c84694">
             <a:alphaModFix amt="28000"/>
           </a:blip>
           <a:stretch xmlns:a="http://schemas.openxmlformats.org/drawingml/2006/main"/>
@@ -3745,7 +3745,7 @@
           <p:nvPr/>
         </p:nvPicPr>
         <p:blipFill rotWithShape="1">
-          <a:blip xmlns:r="http://schemas.openxmlformats.org/officeDocument/2006/relationships" xmlns:a="http://schemas.openxmlformats.org/drawingml/2006/main" r:embed="R13d71dcb7d064988">
+          <a:blip xmlns:r="http://schemas.openxmlformats.org/officeDocument/2006/relationships" xmlns:a="http://schemas.openxmlformats.org/drawingml/2006/main" r:embed="Rfa5d3d42b19948ec">
             <a:alphaModFix amt="28000"/>
           </a:blip>
           <a:stretch xmlns:a="http://schemas.openxmlformats.org/drawingml/2006/main"/>
@@ -3982,17 +3982,17 @@
   </p:cSld>
   <p:clrMap bg1="lt1" tx1="dk1" bg2="lt2" tx2="dk2" accent1="accent1" accent2="accent2" accent3="accent3" accent4="accent4" accent5="accent5" accent6="accent6" hlink="hlink" folHlink="folHlink"/>
   <p:sldLayoutIdLst>
-    <p:sldLayoutId xmlns:r="http://schemas.openxmlformats.org/officeDocument/2006/relationships" id="2147483649" r:id="R58a2bdd671e144ba"/>
-    <p:sldLayoutId xmlns:r="http://schemas.openxmlformats.org/officeDocument/2006/relationships" id="2147483650" r:id="Rf8f76c146ed14992"/>
-    <p:sldLayoutId xmlns:r="http://schemas.openxmlformats.org/officeDocument/2006/relationships" id="2147483651" r:id="R758dd976a8d74d49"/>
-    <p:sldLayoutId xmlns:r="http://schemas.openxmlformats.org/officeDocument/2006/relationships" id="2147483652" r:id="R34197401a2464592"/>
-    <p:sldLayoutId xmlns:r="http://schemas.openxmlformats.org/officeDocument/2006/relationships" id="2147483653" r:id="Ra0033bce88204f0e"/>
-    <p:sldLayoutId xmlns:r="http://schemas.openxmlformats.org/officeDocument/2006/relationships" id="2147483654" r:id="R293967cf84f14c32"/>
-    <p:sldLayoutId xmlns:r="http://schemas.openxmlformats.org/officeDocument/2006/relationships" id="2147483655" r:id="R870a74e4236a49ac"/>
-    <p:sldLayoutId xmlns:r="http://schemas.openxmlformats.org/officeDocument/2006/relationships" id="2147483656" r:id="R9ec3dd3db635456e"/>
-    <p:sldLayoutId xmlns:r="http://schemas.openxmlformats.org/officeDocument/2006/relationships" id="2147483657" r:id="R97e6334bf607417c"/>
-    <p:sldLayoutId xmlns:r="http://schemas.openxmlformats.org/officeDocument/2006/relationships" id="2147483658" r:id="R3f12de862800418c"/>
-    <p:sldLayoutId xmlns:r="http://schemas.openxmlformats.org/officeDocument/2006/relationships" id="2147483659" r:id="Rd8fb7be23bf74edc"/>
+    <p:sldLayoutId xmlns:r="http://schemas.openxmlformats.org/officeDocument/2006/relationships" id="2147483649" r:id="R4b053ad10c954bd5"/>
+    <p:sldLayoutId xmlns:r="http://schemas.openxmlformats.org/officeDocument/2006/relationships" id="2147483650" r:id="Rca35c30384f44208"/>
+    <p:sldLayoutId xmlns:r="http://schemas.openxmlformats.org/officeDocument/2006/relationships" id="2147483651" r:id="R7dffdb0962a94fd7"/>
+    <p:sldLayoutId xmlns:r="http://schemas.openxmlformats.org/officeDocument/2006/relationships" id="2147483652" r:id="Rf6738c0b4af14f94"/>
+    <p:sldLayoutId xmlns:r="http://schemas.openxmlformats.org/officeDocument/2006/relationships" id="2147483653" r:id="R8267b85e8d21440a"/>
+    <p:sldLayoutId xmlns:r="http://schemas.openxmlformats.org/officeDocument/2006/relationships" id="2147483654" r:id="Rd519e978b53d4ab9"/>
+    <p:sldLayoutId xmlns:r="http://schemas.openxmlformats.org/officeDocument/2006/relationships" id="2147483655" r:id="R8446777546ba4881"/>
+    <p:sldLayoutId xmlns:r="http://schemas.openxmlformats.org/officeDocument/2006/relationships" id="2147483656" r:id="Ra118fd24de134d40"/>
+    <p:sldLayoutId xmlns:r="http://schemas.openxmlformats.org/officeDocument/2006/relationships" id="2147483657" r:id="R91bf0032116b4b77"/>
+    <p:sldLayoutId xmlns:r="http://schemas.openxmlformats.org/officeDocument/2006/relationships" id="2147483658" r:id="R62ffc236a7464ba4"/>
+    <p:sldLayoutId xmlns:r="http://schemas.openxmlformats.org/officeDocument/2006/relationships" id="2147483659" r:id="Rfbb68c08ef97422d"/>
   </p:sldLayoutIdLst>
   <p:hf hdr="0" ftr="0" dt="0"/>
   <p:txStyles>

--- a/Mapped Curriculum Lessons/Grade 6/Lesson 06 - Logical Choices/Logical Choices - Slides.pptx
+++ b/Mapped Curriculum Lessons/Grade 6/Lesson 06 - Logical Choices/Logical Choices - Slides.pptx
@@ -2,28 +2,28 @@
 <file path=ppt/presentation.xml><?xml version="1.0" encoding="utf-8"?>
 <p:presentation xmlns:p="http://schemas.openxmlformats.org/presentationml/2006/main" embedTrueTypeFonts="1" saveSubsetFonts="0">
   <p:sldMasterIdLst>
-    <p:sldMasterId xmlns:r="http://schemas.openxmlformats.org/officeDocument/2006/relationships" id="2147483648" r:id="Rd410ac09017049b4"/>
+    <p:sldMasterId xmlns:r="http://schemas.openxmlformats.org/officeDocument/2006/relationships" id="2147483648" r:id="Re2e84ed0ef0949b7"/>
   </p:sldMasterIdLst>
   <p:notesMasterIdLst>
-    <p:notesMasterId xmlns:r="http://schemas.openxmlformats.org/officeDocument/2006/relationships" r:id="Rfcee7ed52f3b4403"/>
+    <p:notesMasterId xmlns:r="http://schemas.openxmlformats.org/officeDocument/2006/relationships" r:id="R5945f92af9a94811"/>
   </p:notesMasterIdLst>
   <p:sldIdLst>
-    <p:sldId xmlns:r="http://schemas.openxmlformats.org/officeDocument/2006/relationships" id="256" r:id="R1504f588b2d44137"/>
-    <p:sldId xmlns:r="http://schemas.openxmlformats.org/officeDocument/2006/relationships" id="257" r:id="Rbbb87918af704ecc"/>
-    <p:sldId xmlns:r="http://schemas.openxmlformats.org/officeDocument/2006/relationships" id="258" r:id="Rd1e64b62d0674375"/>
-    <p:sldId xmlns:r="http://schemas.openxmlformats.org/officeDocument/2006/relationships" id="259" r:id="R3b9bbd3008ec46c7"/>
-    <p:sldId xmlns:r="http://schemas.openxmlformats.org/officeDocument/2006/relationships" id="260" r:id="R4b5a1cfd59c94353"/>
-    <p:sldId xmlns:r="http://schemas.openxmlformats.org/officeDocument/2006/relationships" id="261" r:id="Rd00e6e63fe364228"/>
-    <p:sldId xmlns:r="http://schemas.openxmlformats.org/officeDocument/2006/relationships" id="262" r:id="R13d00109a9e34e78"/>
-    <p:sldId xmlns:r="http://schemas.openxmlformats.org/officeDocument/2006/relationships" id="263" r:id="Ra745d5a16d1447ae"/>
-    <p:sldId xmlns:r="http://schemas.openxmlformats.org/officeDocument/2006/relationships" id="264" r:id="Rafc190c3f87c45a2"/>
+    <p:sldId xmlns:r="http://schemas.openxmlformats.org/officeDocument/2006/relationships" id="256" r:id="Rb0fb57d0d02e4e50"/>
+    <p:sldId xmlns:r="http://schemas.openxmlformats.org/officeDocument/2006/relationships" id="257" r:id="R17277347c0774cef"/>
+    <p:sldId xmlns:r="http://schemas.openxmlformats.org/officeDocument/2006/relationships" id="258" r:id="Rc4e0e47ae10d449c"/>
+    <p:sldId xmlns:r="http://schemas.openxmlformats.org/officeDocument/2006/relationships" id="259" r:id="Rede2741657654244"/>
+    <p:sldId xmlns:r="http://schemas.openxmlformats.org/officeDocument/2006/relationships" id="260" r:id="R614dca13db6a4a0d"/>
+    <p:sldId xmlns:r="http://schemas.openxmlformats.org/officeDocument/2006/relationships" id="261" r:id="R2a06c8ac445246b4"/>
+    <p:sldId xmlns:r="http://schemas.openxmlformats.org/officeDocument/2006/relationships" id="262" r:id="R028d9685c66b4660"/>
+    <p:sldId xmlns:r="http://schemas.openxmlformats.org/officeDocument/2006/relationships" id="263" r:id="Rc35766a8f5c64f67"/>
+    <p:sldId xmlns:r="http://schemas.openxmlformats.org/officeDocument/2006/relationships" id="264" r:id="R3844d0f611f64f4c"/>
   </p:sldIdLst>
   <p:sldSz cx="12192000" cy="6858000"/>
   <p:notesSz cx="6858000" cy="9144000"/>
   <p:embeddedFontLst>
     <p:embeddedFont>
       <p:font typeface="JetBrains Mono"/>
-      <p:regular xmlns:r="http://schemas.openxmlformats.org/officeDocument/2006/relationships" r:id="Rd3658f11d2eb4d81"/>
+      <p:regular xmlns:r="http://schemas.openxmlformats.org/officeDocument/2006/relationships" r:id="Rd9b7ac71e0fa4d1a"/>
     </p:embeddedFont>
   </p:embeddedFontLst>
 </p:presentation>
@@ -1071,7 +1071,7 @@
           <p:nvPr/>
         </p:nvPicPr>
         <p:blipFill rotWithShape="1">
-          <a:blip xmlns:r="http://schemas.openxmlformats.org/officeDocument/2006/relationships" xmlns:a="http://schemas.openxmlformats.org/drawingml/2006/main" r:embed="R3a274a3161654198"/>
+          <a:blip xmlns:r="http://schemas.openxmlformats.org/officeDocument/2006/relationships" xmlns:a="http://schemas.openxmlformats.org/drawingml/2006/main" r:embed="Re5a79401e9c44eac"/>
           <a:stretch xmlns:a="http://schemas.openxmlformats.org/drawingml/2006/main"/>
         </p:blipFill>
         <p:spPr>
@@ -1451,7 +1451,7 @@
           <p:nvPr/>
         </p:nvPicPr>
         <p:blipFill rotWithShape="1">
-          <a:blip xmlns:r="http://schemas.openxmlformats.org/officeDocument/2006/relationships" xmlns:a="http://schemas.openxmlformats.org/drawingml/2006/main" r:embed="R6fd341862394408a">
+          <a:blip xmlns:r="http://schemas.openxmlformats.org/officeDocument/2006/relationships" xmlns:a="http://schemas.openxmlformats.org/drawingml/2006/main" r:embed="R21a9bddf656b436e">
             <a:alphaModFix amt="28000"/>
           </a:blip>
           <a:stretch xmlns:a="http://schemas.openxmlformats.org/drawingml/2006/main"/>
@@ -1664,7 +1664,7 @@
           <p:nvPr/>
         </p:nvPicPr>
         <p:blipFill rotWithShape="1">
-          <a:blip xmlns:r="http://schemas.openxmlformats.org/officeDocument/2006/relationships" xmlns:a="http://schemas.openxmlformats.org/drawingml/2006/main" r:embed="R715c2b11606a494c">
+          <a:blip xmlns:r="http://schemas.openxmlformats.org/officeDocument/2006/relationships" xmlns:a="http://schemas.openxmlformats.org/drawingml/2006/main" r:embed="R7bb99d99a2224fd0">
             <a:alphaModFix amt="28000"/>
           </a:blip>
           <a:stretch xmlns:a="http://schemas.openxmlformats.org/drawingml/2006/main"/>
@@ -1899,7 +1899,7 @@
           <p:nvPr/>
         </p:nvPicPr>
         <p:blipFill rotWithShape="1">
-          <a:blip xmlns:r="http://schemas.openxmlformats.org/officeDocument/2006/relationships" xmlns:a="http://schemas.openxmlformats.org/drawingml/2006/main" r:embed="R48baa457727a4dfd">
+          <a:blip xmlns:r="http://schemas.openxmlformats.org/officeDocument/2006/relationships" xmlns:a="http://schemas.openxmlformats.org/drawingml/2006/main" r:embed="R22bd2c3c90944541">
             <a:alphaModFix amt="28000"/>
           </a:blip>
           <a:stretch xmlns:a="http://schemas.openxmlformats.org/drawingml/2006/main"/>
@@ -2176,7 +2176,7 @@
           <p:nvPr/>
         </p:nvPicPr>
         <p:blipFill rotWithShape="1">
-          <a:blip xmlns:r="http://schemas.openxmlformats.org/officeDocument/2006/relationships" xmlns:a="http://schemas.openxmlformats.org/drawingml/2006/main" r:embed="Re2dfde228bb8406a">
+          <a:blip xmlns:r="http://schemas.openxmlformats.org/officeDocument/2006/relationships" xmlns:a="http://schemas.openxmlformats.org/drawingml/2006/main" r:embed="Ra243aaaade224813">
             <a:alphaModFix amt="28000"/>
           </a:blip>
           <a:stretch xmlns:a="http://schemas.openxmlformats.org/drawingml/2006/main"/>
@@ -2451,7 +2451,7 @@
           <p:nvPr/>
         </p:nvPicPr>
         <p:blipFill rotWithShape="1">
-          <a:blip xmlns:r="http://schemas.openxmlformats.org/officeDocument/2006/relationships" xmlns:a="http://schemas.openxmlformats.org/drawingml/2006/main" r:embed="R81784ec8e4134d18">
+          <a:blip xmlns:r="http://schemas.openxmlformats.org/officeDocument/2006/relationships" xmlns:a="http://schemas.openxmlformats.org/drawingml/2006/main" r:embed="R56802cc667fb47d0">
             <a:alphaModFix amt="28000"/>
           </a:blip>
           <a:stretch xmlns:a="http://schemas.openxmlformats.org/drawingml/2006/main"/>
@@ -2875,7 +2875,7 @@
           <p:nvPr/>
         </p:nvPicPr>
         <p:blipFill rotWithShape="1">
-          <a:blip xmlns:r="http://schemas.openxmlformats.org/officeDocument/2006/relationships" xmlns:a="http://schemas.openxmlformats.org/drawingml/2006/main" r:embed="R53096c5e97654051">
+          <a:blip xmlns:r="http://schemas.openxmlformats.org/officeDocument/2006/relationships" xmlns:a="http://schemas.openxmlformats.org/drawingml/2006/main" r:embed="Rbd64a0f384f547ed">
             <a:alphaModFix amt="28000"/>
           </a:blip>
           <a:stretch xmlns:a="http://schemas.openxmlformats.org/drawingml/2006/main"/>
@@ -3016,7 +3016,7 @@
           <p:nvPr/>
         </p:nvPicPr>
         <p:blipFill rotWithShape="1">
-          <a:blip xmlns:r="http://schemas.openxmlformats.org/officeDocument/2006/relationships" xmlns:a="http://schemas.openxmlformats.org/drawingml/2006/main" r:embed="R5ce281a198df4043">
+          <a:blip xmlns:r="http://schemas.openxmlformats.org/officeDocument/2006/relationships" xmlns:a="http://schemas.openxmlformats.org/drawingml/2006/main" r:embed="R5bf2c713f2a64e60">
             <a:alphaModFix amt="28000"/>
           </a:blip>
           <a:stretch xmlns:a="http://schemas.openxmlformats.org/drawingml/2006/main"/>
@@ -3130,7 +3130,7 @@
           <p:nvPr/>
         </p:nvPicPr>
         <p:blipFill rotWithShape="1">
-          <a:blip xmlns:r="http://schemas.openxmlformats.org/officeDocument/2006/relationships" xmlns:a="http://schemas.openxmlformats.org/drawingml/2006/main" r:embed="R47acbd2593134d6e">
+          <a:blip xmlns:r="http://schemas.openxmlformats.org/officeDocument/2006/relationships" xmlns:a="http://schemas.openxmlformats.org/drawingml/2006/main" r:embed="Rd8e0f25bac20470e">
             <a:alphaModFix amt="28000"/>
           </a:blip>
           <a:stretch xmlns:a="http://schemas.openxmlformats.org/drawingml/2006/main"/>
@@ -3457,7 +3457,7 @@
           <p:nvPr/>
         </p:nvPicPr>
         <p:blipFill rotWithShape="1">
-          <a:blip xmlns:r="http://schemas.openxmlformats.org/officeDocument/2006/relationships" xmlns:a="http://schemas.openxmlformats.org/drawingml/2006/main" r:embed="R4cbfe6cb97c84694">
+          <a:blip xmlns:r="http://schemas.openxmlformats.org/officeDocument/2006/relationships" xmlns:a="http://schemas.openxmlformats.org/drawingml/2006/main" r:embed="R355f6bc0554a4544">
             <a:alphaModFix amt="28000"/>
           </a:blip>
           <a:stretch xmlns:a="http://schemas.openxmlformats.org/drawingml/2006/main"/>
@@ -3745,7 +3745,7 @@
           <p:nvPr/>
         </p:nvPicPr>
         <p:blipFill rotWithShape="1">
-          <a:blip xmlns:r="http://schemas.openxmlformats.org/officeDocument/2006/relationships" xmlns:a="http://schemas.openxmlformats.org/drawingml/2006/main" r:embed="Rfa5d3d42b19948ec">
+          <a:blip xmlns:r="http://schemas.openxmlformats.org/officeDocument/2006/relationships" xmlns:a="http://schemas.openxmlformats.org/drawingml/2006/main" r:embed="R5d17a4932d034729">
             <a:alphaModFix amt="28000"/>
           </a:blip>
           <a:stretch xmlns:a="http://schemas.openxmlformats.org/drawingml/2006/main"/>
@@ -3982,17 +3982,17 @@
   </p:cSld>
   <p:clrMap bg1="lt1" tx1="dk1" bg2="lt2" tx2="dk2" accent1="accent1" accent2="accent2" accent3="accent3" accent4="accent4" accent5="accent5" accent6="accent6" hlink="hlink" folHlink="folHlink"/>
   <p:sldLayoutIdLst>
-    <p:sldLayoutId xmlns:r="http://schemas.openxmlformats.org/officeDocument/2006/relationships" id="2147483649" r:id="R4b053ad10c954bd5"/>
-    <p:sldLayoutId xmlns:r="http://schemas.openxmlformats.org/officeDocument/2006/relationships" id="2147483650" r:id="Rca35c30384f44208"/>
-    <p:sldLayoutId xmlns:r="http://schemas.openxmlformats.org/officeDocument/2006/relationships" id="2147483651" r:id="R7dffdb0962a94fd7"/>
-    <p:sldLayoutId xmlns:r="http://schemas.openxmlformats.org/officeDocument/2006/relationships" id="2147483652" r:id="Rf6738c0b4af14f94"/>
-    <p:sldLayoutId xmlns:r="http://schemas.openxmlformats.org/officeDocument/2006/relationships" id="2147483653" r:id="R8267b85e8d21440a"/>
-    <p:sldLayoutId xmlns:r="http://schemas.openxmlformats.org/officeDocument/2006/relationships" id="2147483654" r:id="Rd519e978b53d4ab9"/>
-    <p:sldLayoutId xmlns:r="http://schemas.openxmlformats.org/officeDocument/2006/relationships" id="2147483655" r:id="R8446777546ba4881"/>
-    <p:sldLayoutId xmlns:r="http://schemas.openxmlformats.org/officeDocument/2006/relationships" id="2147483656" r:id="Ra118fd24de134d40"/>
-    <p:sldLayoutId xmlns:r="http://schemas.openxmlformats.org/officeDocument/2006/relationships" id="2147483657" r:id="R91bf0032116b4b77"/>
-    <p:sldLayoutId xmlns:r="http://schemas.openxmlformats.org/officeDocument/2006/relationships" id="2147483658" r:id="R62ffc236a7464ba4"/>
-    <p:sldLayoutId xmlns:r="http://schemas.openxmlformats.org/officeDocument/2006/relationships" id="2147483659" r:id="Rfbb68c08ef97422d"/>
+    <p:sldLayoutId xmlns:r="http://schemas.openxmlformats.org/officeDocument/2006/relationships" id="2147483649" r:id="R785cdf91678747a5"/>
+    <p:sldLayoutId xmlns:r="http://schemas.openxmlformats.org/officeDocument/2006/relationships" id="2147483650" r:id="R6ca9fd3a55894a3d"/>
+    <p:sldLayoutId xmlns:r="http://schemas.openxmlformats.org/officeDocument/2006/relationships" id="2147483651" r:id="R53000d2c7b594fb6"/>
+    <p:sldLayoutId xmlns:r="http://schemas.openxmlformats.org/officeDocument/2006/relationships" id="2147483652" r:id="R7abf30a5e87a4a36"/>
+    <p:sldLayoutId xmlns:r="http://schemas.openxmlformats.org/officeDocument/2006/relationships" id="2147483653" r:id="R87852f844f604c2f"/>
+    <p:sldLayoutId xmlns:r="http://schemas.openxmlformats.org/officeDocument/2006/relationships" id="2147483654" r:id="Rbfbef9de00f1421d"/>
+    <p:sldLayoutId xmlns:r="http://schemas.openxmlformats.org/officeDocument/2006/relationships" id="2147483655" r:id="R57887082d43d4579"/>
+    <p:sldLayoutId xmlns:r="http://schemas.openxmlformats.org/officeDocument/2006/relationships" id="2147483656" r:id="R1256ad2a39854106"/>
+    <p:sldLayoutId xmlns:r="http://schemas.openxmlformats.org/officeDocument/2006/relationships" id="2147483657" r:id="Rd62156c2e7f04a21"/>
+    <p:sldLayoutId xmlns:r="http://schemas.openxmlformats.org/officeDocument/2006/relationships" id="2147483658" r:id="R3673b7db2de54e08"/>
+    <p:sldLayoutId xmlns:r="http://schemas.openxmlformats.org/officeDocument/2006/relationships" id="2147483659" r:id="R7a6b287b821b4997"/>
   </p:sldLayoutIdLst>
   <p:hf hdr="0" ftr="0" dt="0"/>
   <p:txStyles>
@@ -5186,35 +5186,13 @@
             <a:r>
               <a:rPr sz="2400">
                 <a:solidFill>
-                  <a:srgbClr val="080808"/>
-                </a:solidFill>
-                <a:latin typeface="JetBrains Mono"/>
-                <a:ea typeface="JetBrains Mono"/>
-                <a:cs typeface="JetBrains Mono"/>
-              </a:rPr>
-              <a:t> </a:t>
-            </a:r>
-            <a:r>
-              <a:rPr sz="2400">
-                <a:solidFill>
                   <a:srgbClr val="067D17"/>
                 </a:solidFill>
                 <a:latin typeface="JetBrains Mono"/>
                 <a:ea typeface="JetBrains Mono"/>
                 <a:cs typeface="JetBrains Mono"/>
               </a:rPr>
-              <a:t>"yes"</a:t>
-            </a:r>
-            <a:r>
-              <a:rPr sz="2400">
-                <a:solidFill>
-                  <a:srgbClr val="080808"/>
-                </a:solidFill>
-                <a:latin typeface="JetBrains Mono"/>
-                <a:ea typeface="JetBrains Mono"/>
-                <a:cs typeface="JetBrains Mono"/>
-              </a:rPr>
-              <a:t> </a:t>
+              <a:t> "yes"</a:t>
             </a:r>
             <a:r>
               <a:rPr sz="2400">
@@ -5225,7 +5203,7 @@
                 <a:ea typeface="JetBrains Mono"/>
                 <a:cs typeface="JetBrains Mono"/>
               </a:rPr>
-              <a:t>or</a:t>
+              <a:t> or</a:t>
             </a:r>
             <a:r>
               <a:rPr sz="2400">
@@ -5252,24 +5230,13 @@
             <a:r>
               <a:rPr sz="2400">
                 <a:solidFill>
-                  <a:srgbClr val="080808"/>
-                </a:solidFill>
-                <a:latin typeface="JetBrains Mono"/>
-                <a:ea typeface="JetBrains Mono"/>
-                <a:cs typeface="JetBrains Mono"/>
-              </a:rPr>
-              <a:t> </a:t>
-            </a:r>
-            <a:r>
-              <a:rPr sz="2400">
-                <a:solidFill>
                   <a:srgbClr val="067D17"/>
                 </a:solidFill>
                 <a:latin typeface="JetBrains Mono"/>
                 <a:ea typeface="JetBrains Mono"/>
                 <a:cs typeface="JetBrains Mono"/>
               </a:rPr>
-              <a:t>"yes"</a:t>
+              <a:t> "yes"</a:t>
             </a:r>
             <a:r>
               <a:rPr sz="2400">
@@ -5293,24 +5260,13 @@
             <a:r>
               <a:rPr sz="2400">
                 <a:solidFill>
-                  <a:srgbClr val="080808"/>
-                </a:solidFill>
-                <a:latin typeface="JetBrains Mono"/>
-                <a:ea typeface="JetBrains Mono"/>
-                <a:cs typeface="JetBrains Mono"/>
-              </a:rPr>
-              <a:t>    </a:t>
-            </a:r>
-            <a:r>
-              <a:rPr sz="2400">
-                <a:solidFill>
                   <a:srgbClr val="1750EB"/>
                 </a:solidFill>
                 <a:latin typeface="JetBrains Mono"/>
                 <a:ea typeface="JetBrains Mono"/>
                 <a:cs typeface="JetBrains Mono"/>
               </a:rPr>
-              <a:t>print</a:t>
+              <a:t>    print</a:t>
             </a:r>
             <a:r>
               <a:rPr sz="2400">
@@ -5386,24 +5342,13 @@
             <a:r>
               <a:rPr sz="2400">
                 <a:solidFill>
-                  <a:srgbClr val="080808"/>
-                </a:solidFill>
-                <a:latin typeface="JetBrains Mono"/>
-                <a:ea typeface="JetBrains Mono"/>
-                <a:cs typeface="JetBrains Mono"/>
-              </a:rPr>
-              <a:t>    </a:t>
-            </a:r>
-            <a:r>
-              <a:rPr sz="2400">
-                <a:solidFill>
                   <a:srgbClr val="1750EB"/>
                 </a:solidFill>
                 <a:latin typeface="JetBrains Mono"/>
                 <a:ea typeface="JetBrains Mono"/>
                 <a:cs typeface="JetBrains Mono"/>
               </a:rPr>
-              <a:t>print</a:t>
+              <a:t>    print</a:t>
             </a:r>
             <a:r>
               <a:rPr sz="2400">
@@ -6014,35 +5959,13 @@
             <a:r>
               <a:rPr sz="2400">
                 <a:solidFill>
-                  <a:srgbClr val="080808"/>
-                </a:solidFill>
-                <a:latin typeface="JetBrains Mono"/>
-                <a:ea typeface="JetBrains Mono"/>
-                <a:cs typeface="JetBrains Mono"/>
-              </a:rPr>
-              <a:t> </a:t>
-            </a:r>
-            <a:r>
-              <a:rPr sz="2400">
-                <a:solidFill>
                   <a:srgbClr val="067D17"/>
                 </a:solidFill>
                 <a:latin typeface="JetBrains Mono"/>
                 <a:ea typeface="JetBrains Mono"/>
                 <a:cs typeface="JetBrains Mono"/>
               </a:rPr>
-              <a:t>"yes"</a:t>
-            </a:r>
-            <a:r>
-              <a:rPr sz="2400">
-                <a:solidFill>
-                  <a:srgbClr val="080808"/>
-                </a:solidFill>
-                <a:latin typeface="JetBrains Mono"/>
-                <a:ea typeface="JetBrains Mono"/>
-                <a:cs typeface="JetBrains Mono"/>
-              </a:rPr>
-              <a:t> </a:t>
+              <a:t> "yes"</a:t>
             </a:r>
             <a:r>
               <a:rPr sz="2400">
@@ -6053,7 +5976,7 @@
                 <a:ea typeface="JetBrains Mono"/>
                 <a:cs typeface="JetBrains Mono"/>
               </a:rPr>
-              <a:t>or</a:t>
+              <a:t> or</a:t>
             </a:r>
             <a:r>
               <a:rPr sz="2400">
@@ -6080,24 +6003,13 @@
             <a:r>
               <a:rPr sz="2400">
                 <a:solidFill>
-                  <a:srgbClr val="080808"/>
-                </a:solidFill>
-                <a:latin typeface="JetBrains Mono"/>
-                <a:ea typeface="JetBrains Mono"/>
-                <a:cs typeface="JetBrains Mono"/>
-              </a:rPr>
-              <a:t> </a:t>
-            </a:r>
-            <a:r>
-              <a:rPr sz="2400">
-                <a:solidFill>
                   <a:srgbClr val="067D17"/>
                 </a:solidFill>
                 <a:latin typeface="JetBrains Mono"/>
                 <a:ea typeface="JetBrains Mono"/>
                 <a:cs typeface="JetBrains Mono"/>
               </a:rPr>
-              <a:t>"yes"</a:t>
+              <a:t> "yes"</a:t>
             </a:r>
             <a:r>
               <a:rPr sz="2400">
@@ -6121,24 +6033,13 @@
             <a:r>
               <a:rPr sz="2400">
                 <a:solidFill>
-                  <a:srgbClr val="080808"/>
-                </a:solidFill>
-                <a:latin typeface="JetBrains Mono"/>
-                <a:ea typeface="JetBrains Mono"/>
-                <a:cs typeface="JetBrains Mono"/>
-              </a:rPr>
-              <a:t>    </a:t>
-            </a:r>
-            <a:r>
-              <a:rPr sz="2400">
-                <a:solidFill>
                   <a:srgbClr val="1750EB"/>
                 </a:solidFill>
                 <a:latin typeface="JetBrains Mono"/>
                 <a:ea typeface="JetBrains Mono"/>
                 <a:cs typeface="JetBrains Mono"/>
               </a:rPr>
-              <a:t>print</a:t>
+              <a:t>    print</a:t>
             </a:r>
             <a:r>
               <a:rPr sz="2400">
@@ -6214,24 +6115,13 @@
             <a:r>
               <a:rPr sz="2400">
                 <a:solidFill>
-                  <a:srgbClr val="080808"/>
-                </a:solidFill>
-                <a:latin typeface="JetBrains Mono"/>
-                <a:ea typeface="JetBrains Mono"/>
-                <a:cs typeface="JetBrains Mono"/>
-              </a:rPr>
-              <a:t>    </a:t>
-            </a:r>
-            <a:r>
-              <a:rPr sz="2400">
-                <a:solidFill>
                   <a:srgbClr val="1750EB"/>
                 </a:solidFill>
                 <a:latin typeface="JetBrains Mono"/>
                 <a:ea typeface="JetBrains Mono"/>
                 <a:cs typeface="JetBrains Mono"/>
               </a:rPr>
-              <a:t>print</a:t>
+              <a:t>    print</a:t>
             </a:r>
             <a:r>
               <a:rPr sz="2400">
@@ -6842,35 +6732,13 @@
             <a:r>
               <a:rPr sz="2400">
                 <a:solidFill>
-                  <a:srgbClr val="080808"/>
-                </a:solidFill>
-                <a:latin typeface="JetBrains Mono"/>
-                <a:ea typeface="JetBrains Mono"/>
-                <a:cs typeface="JetBrains Mono"/>
-              </a:rPr>
-              <a:t> </a:t>
-            </a:r>
-            <a:r>
-              <a:rPr sz="2400">
-                <a:solidFill>
                   <a:srgbClr val="067D17"/>
                 </a:solidFill>
                 <a:latin typeface="JetBrains Mono"/>
                 <a:ea typeface="JetBrains Mono"/>
                 <a:cs typeface="JetBrains Mono"/>
               </a:rPr>
-              <a:t>"yes"</a:t>
-            </a:r>
-            <a:r>
-              <a:rPr sz="2400">
-                <a:solidFill>
-                  <a:srgbClr val="080808"/>
-                </a:solidFill>
-                <a:latin typeface="JetBrains Mono"/>
-                <a:ea typeface="JetBrains Mono"/>
-                <a:cs typeface="JetBrains Mono"/>
-              </a:rPr>
-              <a:t> </a:t>
+              <a:t> "yes"</a:t>
             </a:r>
             <a:r>
               <a:rPr sz="2400">
@@ -6881,7 +6749,7 @@
                 <a:ea typeface="JetBrains Mono"/>
                 <a:cs typeface="JetBrains Mono"/>
               </a:rPr>
-              <a:t>or</a:t>
+              <a:t> or</a:t>
             </a:r>
             <a:r>
               <a:rPr sz="2400">
@@ -6908,24 +6776,13 @@
             <a:r>
               <a:rPr sz="2400">
                 <a:solidFill>
-                  <a:srgbClr val="080808"/>
-                </a:solidFill>
-                <a:latin typeface="JetBrains Mono"/>
-                <a:ea typeface="JetBrains Mono"/>
-                <a:cs typeface="JetBrains Mono"/>
-              </a:rPr>
-              <a:t> </a:t>
-            </a:r>
-            <a:r>
-              <a:rPr sz="2400">
-                <a:solidFill>
                   <a:srgbClr val="067D17"/>
                 </a:solidFill>
                 <a:latin typeface="JetBrains Mono"/>
                 <a:ea typeface="JetBrains Mono"/>
                 <a:cs typeface="JetBrains Mono"/>
               </a:rPr>
-              <a:t>"yes"</a:t>
+              <a:t> "yes"</a:t>
             </a:r>
             <a:r>
               <a:rPr sz="2400">
@@ -6949,24 +6806,13 @@
             <a:r>
               <a:rPr sz="2400">
                 <a:solidFill>
-                  <a:srgbClr val="080808"/>
-                </a:solidFill>
-                <a:latin typeface="JetBrains Mono"/>
-                <a:ea typeface="JetBrains Mono"/>
-                <a:cs typeface="JetBrains Mono"/>
-              </a:rPr>
-              <a:t>    </a:t>
-            </a:r>
-            <a:r>
-              <a:rPr sz="2400">
-                <a:solidFill>
                   <a:srgbClr val="1750EB"/>
                 </a:solidFill>
                 <a:latin typeface="JetBrains Mono"/>
                 <a:ea typeface="JetBrains Mono"/>
                 <a:cs typeface="JetBrains Mono"/>
               </a:rPr>
-              <a:t>print</a:t>
+              <a:t>    print</a:t>
             </a:r>
             <a:r>
               <a:rPr sz="2400">
@@ -7042,24 +6888,13 @@
             <a:r>
               <a:rPr sz="2400">
                 <a:solidFill>
-                  <a:srgbClr val="080808"/>
-                </a:solidFill>
-                <a:latin typeface="JetBrains Mono"/>
-                <a:ea typeface="JetBrains Mono"/>
-                <a:cs typeface="JetBrains Mono"/>
-              </a:rPr>
-              <a:t>    </a:t>
-            </a:r>
-            <a:r>
-              <a:rPr sz="2400">
-                <a:solidFill>
                   <a:srgbClr val="1750EB"/>
                 </a:solidFill>
                 <a:latin typeface="JetBrains Mono"/>
                 <a:ea typeface="JetBrains Mono"/>
                 <a:cs typeface="JetBrains Mono"/>
               </a:rPr>
-              <a:t>print</a:t>
+              <a:t>    print</a:t>
             </a:r>
             <a:r>
               <a:rPr sz="2400">
@@ -7927,35 +7762,13 @@
             <a:r>
               <a:rPr sz="1400">
                 <a:solidFill>
-                  <a:srgbClr val="080808"/>
-                </a:solidFill>
-                <a:latin typeface="JetBrains Mono"/>
-                <a:ea typeface="JetBrains Mono"/>
-                <a:cs typeface="JetBrains Mono"/>
-              </a:rPr>
-              <a:t> </a:t>
-            </a:r>
-            <a:r>
-              <a:rPr sz="1400">
-                <a:solidFill>
                   <a:srgbClr val="067D17"/>
                 </a:solidFill>
                 <a:latin typeface="JetBrains Mono"/>
                 <a:ea typeface="JetBrains Mono"/>
                 <a:cs typeface="JetBrains Mono"/>
               </a:rPr>
-              <a:t>"yes"</a:t>
-            </a:r>
-            <a:r>
-              <a:rPr sz="1400">
-                <a:solidFill>
-                  <a:srgbClr val="080808"/>
-                </a:solidFill>
-                <a:latin typeface="JetBrains Mono"/>
-                <a:ea typeface="JetBrains Mono"/>
-                <a:cs typeface="JetBrains Mono"/>
-              </a:rPr>
-              <a:t> </a:t>
+              <a:t> "yes"</a:t>
             </a:r>
             <a:r>
               <a:rPr sz="1400">
@@ -7966,7 +7779,7 @@
                 <a:ea typeface="JetBrains Mono"/>
                 <a:cs typeface="JetBrains Mono"/>
               </a:rPr>
-              <a:t>or</a:t>
+              <a:t> or</a:t>
             </a:r>
             <a:r>
               <a:rPr sz="1400">
@@ -7993,24 +7806,13 @@
             <a:r>
               <a:rPr sz="1400">
                 <a:solidFill>
-                  <a:srgbClr val="080808"/>
-                </a:solidFill>
-                <a:latin typeface="JetBrains Mono"/>
-                <a:ea typeface="JetBrains Mono"/>
-                <a:cs typeface="JetBrains Mono"/>
-              </a:rPr>
-              <a:t> </a:t>
-            </a:r>
-            <a:r>
-              <a:rPr sz="1400">
-                <a:solidFill>
                   <a:srgbClr val="067D17"/>
                 </a:solidFill>
                 <a:latin typeface="JetBrains Mono"/>
                 <a:ea typeface="JetBrains Mono"/>
                 <a:cs typeface="JetBrains Mono"/>
               </a:rPr>
-              <a:t>"yes"</a:t>
+              <a:t> "yes"</a:t>
             </a:r>
             <a:r>
               <a:rPr sz="1400">
@@ -8036,24 +7838,13 @@
             <a:r>
               <a:rPr sz="1400">
                 <a:solidFill>
-                  <a:srgbClr val="080808"/>
-                </a:solidFill>
-                <a:latin typeface="JetBrains Mono"/>
-                <a:ea typeface="JetBrains Mono"/>
-                <a:cs typeface="JetBrains Mono"/>
-              </a:rPr>
-              <a:t>    </a:t>
-            </a:r>
-            <a:r>
-              <a:rPr sz="1400">
-                <a:solidFill>
                   <a:srgbClr val="1750EB"/>
                 </a:solidFill>
                 <a:latin typeface="JetBrains Mono"/>
                 <a:ea typeface="JetBrains Mono"/>
                 <a:cs typeface="JetBrains Mono"/>
               </a:rPr>
-              <a:t>print</a:t>
+              <a:t>    print</a:t>
             </a:r>
             <a:r>
               <a:rPr sz="1400">
@@ -8133,24 +7924,13 @@
             <a:r>
               <a:rPr sz="1400">
                 <a:solidFill>
-                  <a:srgbClr val="080808"/>
-                </a:solidFill>
-                <a:latin typeface="JetBrains Mono"/>
-                <a:ea typeface="JetBrains Mono"/>
-                <a:cs typeface="JetBrains Mono"/>
-              </a:rPr>
-              <a:t>    </a:t>
-            </a:r>
-            <a:r>
-              <a:rPr sz="1400">
-                <a:solidFill>
                   <a:srgbClr val="1750EB"/>
                 </a:solidFill>
                 <a:latin typeface="JetBrains Mono"/>
                 <a:ea typeface="JetBrains Mono"/>
                 <a:cs typeface="JetBrains Mono"/>
               </a:rPr>
-              <a:t>print</a:t>
+              <a:t>    print</a:t>
             </a:r>
             <a:r>
               <a:rPr sz="1400">
@@ -8901,35 +8681,13 @@
             <a:r>
               <a:rPr sz="1400">
                 <a:solidFill>
-                  <a:srgbClr val="080808"/>
-                </a:solidFill>
-                <a:latin typeface="JetBrains Mono"/>
-                <a:ea typeface="JetBrains Mono"/>
-                <a:cs typeface="JetBrains Mono"/>
-              </a:rPr>
-              <a:t> </a:t>
-            </a:r>
-            <a:r>
-              <a:rPr sz="1400">
-                <a:solidFill>
                   <a:srgbClr val="067D17"/>
                 </a:solidFill>
                 <a:latin typeface="JetBrains Mono"/>
                 <a:ea typeface="JetBrains Mono"/>
                 <a:cs typeface="JetBrains Mono"/>
               </a:rPr>
-              <a:t>"yes"</a:t>
-            </a:r>
-            <a:r>
-              <a:rPr sz="1400">
-                <a:solidFill>
-                  <a:srgbClr val="080808"/>
-                </a:solidFill>
-                <a:latin typeface="JetBrains Mono"/>
-                <a:ea typeface="JetBrains Mono"/>
-                <a:cs typeface="JetBrains Mono"/>
-              </a:rPr>
-              <a:t> </a:t>
+              <a:t> "yes"</a:t>
             </a:r>
             <a:r>
               <a:rPr sz="1400">
@@ -8940,7 +8698,7 @@
                 <a:ea typeface="JetBrains Mono"/>
                 <a:cs typeface="JetBrains Mono"/>
               </a:rPr>
-              <a:t>or</a:t>
+              <a:t> or</a:t>
             </a:r>
             <a:r>
               <a:rPr sz="1400">
@@ -8967,24 +8725,13 @@
             <a:r>
               <a:rPr sz="1400">
                 <a:solidFill>
-                  <a:srgbClr val="080808"/>
-                </a:solidFill>
-                <a:latin typeface="JetBrains Mono"/>
-                <a:ea typeface="JetBrains Mono"/>
-                <a:cs typeface="JetBrains Mono"/>
-              </a:rPr>
-              <a:t> </a:t>
-            </a:r>
-            <a:r>
-              <a:rPr sz="1400">
-                <a:solidFill>
                   <a:srgbClr val="067D17"/>
                 </a:solidFill>
                 <a:latin typeface="JetBrains Mono"/>
                 <a:ea typeface="JetBrains Mono"/>
                 <a:cs typeface="JetBrains Mono"/>
               </a:rPr>
-              <a:t>"yes"</a:t>
+              <a:t> "yes"</a:t>
             </a:r>
             <a:r>
               <a:rPr sz="1400">
@@ -9010,24 +8757,13 @@
             <a:r>
               <a:rPr sz="1400">
                 <a:solidFill>
-                  <a:srgbClr val="080808"/>
-                </a:solidFill>
-                <a:latin typeface="JetBrains Mono"/>
-                <a:ea typeface="JetBrains Mono"/>
-                <a:cs typeface="JetBrains Mono"/>
-              </a:rPr>
-              <a:t>    </a:t>
-            </a:r>
-            <a:r>
-              <a:rPr sz="1400">
-                <a:solidFill>
                   <a:srgbClr val="1750EB"/>
                 </a:solidFill>
                 <a:latin typeface="JetBrains Mono"/>
                 <a:ea typeface="JetBrains Mono"/>
                 <a:cs typeface="JetBrains Mono"/>
               </a:rPr>
-              <a:t>print</a:t>
+              <a:t>    print</a:t>
             </a:r>
             <a:r>
               <a:rPr sz="1400">
@@ -9107,24 +8843,13 @@
             <a:r>
               <a:rPr sz="1400">
                 <a:solidFill>
-                  <a:srgbClr val="080808"/>
-                </a:solidFill>
-                <a:latin typeface="JetBrains Mono"/>
-                <a:ea typeface="JetBrains Mono"/>
-                <a:cs typeface="JetBrains Mono"/>
-              </a:rPr>
-              <a:t>    </a:t>
-            </a:r>
-            <a:r>
-              <a:rPr sz="1400">
-                <a:solidFill>
                   <a:srgbClr val="1750EB"/>
                 </a:solidFill>
                 <a:latin typeface="JetBrains Mono"/>
                 <a:ea typeface="JetBrains Mono"/>
                 <a:cs typeface="JetBrains Mono"/>
               </a:rPr>
-              <a:t>print</a:t>
+              <a:t>    print</a:t>
             </a:r>
             <a:r>
               <a:rPr sz="1400">
@@ -9886,35 +9611,13 @@
             <a:r>
               <a:rPr sz="1400">
                 <a:solidFill>
-                  <a:srgbClr val="080808"/>
-                </a:solidFill>
-                <a:latin typeface="JetBrains Mono"/>
-                <a:ea typeface="JetBrains Mono"/>
-                <a:cs typeface="JetBrains Mono"/>
-              </a:rPr>
-              <a:t> </a:t>
-            </a:r>
-            <a:r>
-              <a:rPr sz="1400">
-                <a:solidFill>
                   <a:srgbClr val="067D17"/>
                 </a:solidFill>
                 <a:latin typeface="JetBrains Mono"/>
                 <a:ea typeface="JetBrains Mono"/>
                 <a:cs typeface="JetBrains Mono"/>
               </a:rPr>
-              <a:t>"yes"</a:t>
-            </a:r>
-            <a:r>
-              <a:rPr sz="1400">
-                <a:solidFill>
-                  <a:srgbClr val="080808"/>
-                </a:solidFill>
-                <a:latin typeface="JetBrains Mono"/>
-                <a:ea typeface="JetBrains Mono"/>
-                <a:cs typeface="JetBrains Mono"/>
-              </a:rPr>
-              <a:t> </a:t>
+              <a:t> "yes"</a:t>
             </a:r>
             <a:r>
               <a:rPr sz="1400">
@@ -9925,7 +9628,7 @@
                 <a:ea typeface="JetBrains Mono"/>
                 <a:cs typeface="JetBrains Mono"/>
               </a:rPr>
-              <a:t>or</a:t>
+              <a:t> or</a:t>
             </a:r>
             <a:r>
               <a:rPr sz="1400">
@@ -9952,24 +9655,13 @@
             <a:r>
               <a:rPr sz="1400">
                 <a:solidFill>
-                  <a:srgbClr val="080808"/>
-                </a:solidFill>
-                <a:latin typeface="JetBrains Mono"/>
-                <a:ea typeface="JetBrains Mono"/>
-                <a:cs typeface="JetBrains Mono"/>
-              </a:rPr>
-              <a:t> </a:t>
-            </a:r>
-            <a:r>
-              <a:rPr sz="1400">
-                <a:solidFill>
                   <a:srgbClr val="067D17"/>
                 </a:solidFill>
                 <a:latin typeface="JetBrains Mono"/>
                 <a:ea typeface="JetBrains Mono"/>
                 <a:cs typeface="JetBrains Mono"/>
               </a:rPr>
-              <a:t>"yes"</a:t>
+              <a:t> "yes"</a:t>
             </a:r>
             <a:r>
               <a:rPr sz="1400">
@@ -9995,24 +9687,13 @@
             <a:r>
               <a:rPr sz="1400">
                 <a:solidFill>
-                  <a:srgbClr val="080808"/>
-                </a:solidFill>
-                <a:latin typeface="JetBrains Mono"/>
-                <a:ea typeface="JetBrains Mono"/>
-                <a:cs typeface="JetBrains Mono"/>
-              </a:rPr>
-              <a:t>    </a:t>
-            </a:r>
-            <a:r>
-              <a:rPr sz="1400">
-                <a:solidFill>
                   <a:srgbClr val="1750EB"/>
                 </a:solidFill>
                 <a:latin typeface="JetBrains Mono"/>
                 <a:ea typeface="JetBrains Mono"/>
                 <a:cs typeface="JetBrains Mono"/>
               </a:rPr>
-              <a:t>print</a:t>
+              <a:t>    print</a:t>
             </a:r>
             <a:r>
               <a:rPr sz="1400">
@@ -10092,24 +9773,13 @@
             <a:r>
               <a:rPr sz="1400">
                 <a:solidFill>
-                  <a:srgbClr val="080808"/>
-                </a:solidFill>
-                <a:latin typeface="JetBrains Mono"/>
-                <a:ea typeface="JetBrains Mono"/>
-                <a:cs typeface="JetBrains Mono"/>
-              </a:rPr>
-              <a:t>    </a:t>
-            </a:r>
-            <a:r>
-              <a:rPr sz="1400">
-                <a:solidFill>
                   <a:srgbClr val="1750EB"/>
                 </a:solidFill>
                 <a:latin typeface="JetBrains Mono"/>
                 <a:ea typeface="JetBrains Mono"/>
                 <a:cs typeface="JetBrains Mono"/>
               </a:rPr>
-              <a:t>print</a:t>
+              <a:t>    print</a:t>
             </a:r>
             <a:r>
               <a:rPr sz="1400">
@@ -10970,35 +10640,13 @@
             <a:r>
               <a:rPr sz="1400">
                 <a:solidFill>
-                  <a:srgbClr val="080808"/>
-                </a:solidFill>
-                <a:latin typeface="JetBrains Mono"/>
-                <a:ea typeface="JetBrains Mono"/>
-                <a:cs typeface="JetBrains Mono"/>
-              </a:rPr>
-              <a:t> </a:t>
-            </a:r>
-            <a:r>
-              <a:rPr sz="1400">
-                <a:solidFill>
                   <a:srgbClr val="067D17"/>
                 </a:solidFill>
                 <a:latin typeface="JetBrains Mono"/>
                 <a:ea typeface="JetBrains Mono"/>
                 <a:cs typeface="JetBrains Mono"/>
               </a:rPr>
-              <a:t>"yes"</a:t>
-            </a:r>
-            <a:r>
-              <a:rPr sz="1400">
-                <a:solidFill>
-                  <a:srgbClr val="080808"/>
-                </a:solidFill>
-                <a:latin typeface="JetBrains Mono"/>
-                <a:ea typeface="JetBrains Mono"/>
-                <a:cs typeface="JetBrains Mono"/>
-              </a:rPr>
-              <a:t> </a:t>
+              <a:t> "yes"</a:t>
             </a:r>
             <a:r>
               <a:rPr sz="1400">
@@ -11009,7 +10657,7 @@
                 <a:ea typeface="JetBrains Mono"/>
                 <a:cs typeface="JetBrains Mono"/>
               </a:rPr>
-              <a:t>or</a:t>
+              <a:t> or</a:t>
             </a:r>
             <a:r>
               <a:rPr sz="1400">
@@ -11036,24 +10684,13 @@
             <a:r>
               <a:rPr sz="1400">
                 <a:solidFill>
-                  <a:srgbClr val="080808"/>
-                </a:solidFill>
-                <a:latin typeface="JetBrains Mono"/>
-                <a:ea typeface="JetBrains Mono"/>
-                <a:cs typeface="JetBrains Mono"/>
-              </a:rPr>
-              <a:t> </a:t>
-            </a:r>
-            <a:r>
-              <a:rPr sz="1400">
-                <a:solidFill>
                   <a:srgbClr val="067D17"/>
                 </a:solidFill>
                 <a:latin typeface="JetBrains Mono"/>
                 <a:ea typeface="JetBrains Mono"/>
                 <a:cs typeface="JetBrains Mono"/>
               </a:rPr>
-              <a:t>"yes"</a:t>
+              <a:t> "yes"</a:t>
             </a:r>
             <a:r>
               <a:rPr sz="1400">
@@ -11079,24 +10716,13 @@
             <a:r>
               <a:rPr sz="1400">
                 <a:solidFill>
-                  <a:srgbClr val="080808"/>
-                </a:solidFill>
-                <a:latin typeface="JetBrains Mono"/>
-                <a:ea typeface="JetBrains Mono"/>
-                <a:cs typeface="JetBrains Mono"/>
-              </a:rPr>
-              <a:t>    </a:t>
-            </a:r>
-            <a:r>
-              <a:rPr sz="1400">
-                <a:solidFill>
                   <a:srgbClr val="1750EB"/>
                 </a:solidFill>
                 <a:latin typeface="JetBrains Mono"/>
                 <a:ea typeface="JetBrains Mono"/>
                 <a:cs typeface="JetBrains Mono"/>
               </a:rPr>
-              <a:t>print</a:t>
+              <a:t>    print</a:t>
             </a:r>
             <a:r>
               <a:rPr sz="1400">
@@ -11176,24 +10802,13 @@
             <a:r>
               <a:rPr sz="1400">
                 <a:solidFill>
-                  <a:srgbClr val="080808"/>
-                </a:solidFill>
-                <a:latin typeface="JetBrains Mono"/>
-                <a:ea typeface="JetBrains Mono"/>
-                <a:cs typeface="JetBrains Mono"/>
-              </a:rPr>
-              <a:t>    </a:t>
-            </a:r>
-            <a:r>
-              <a:rPr sz="1400">
-                <a:solidFill>
                   <a:srgbClr val="1750EB"/>
                 </a:solidFill>
                 <a:latin typeface="JetBrains Mono"/>
                 <a:ea typeface="JetBrains Mono"/>
                 <a:cs typeface="JetBrains Mono"/>
               </a:rPr>
-              <a:t>print</a:t>
+              <a:t>    print</a:t>
             </a:r>
             <a:r>
               <a:rPr sz="1400">
@@ -11652,46 +11267,24 @@
             <a:r>
               <a:rPr sz="1800">
                 <a:solidFill>
-                  <a:srgbClr val="080808"/>
-                </a:solidFill>
-                <a:latin typeface="JetBrains Mono"/>
-                <a:ea typeface="JetBrains Mono"/>
-                <a:cs typeface="JetBrains Mono"/>
-              </a:rPr>
-              <a:t> </a:t>
+                  <a:srgbClr val="067D17"/>
+                </a:solidFill>
+                <a:latin typeface="JetBrains Mono"/>
+                <a:ea typeface="JetBrains Mono"/>
+                <a:cs typeface="JetBrains Mono"/>
+              </a:rPr>
+              <a:t> "yes"</a:t>
             </a:r>
             <a:r>
               <a:rPr sz="1800">
                 <a:solidFill>
-                  <a:srgbClr val="067D17"/>
-                </a:solidFill>
-                <a:latin typeface="JetBrains Mono"/>
-                <a:ea typeface="JetBrains Mono"/>
-                <a:cs typeface="JetBrains Mono"/>
-              </a:rPr>
-              <a:t>"yes"</a:t>
-            </a:r>
-            <a:r>
-              <a:rPr sz="1800">
-                <a:solidFill>
-                  <a:srgbClr val="080808"/>
-                </a:solidFill>
-                <a:latin typeface="JetBrains Mono"/>
-                <a:ea typeface="JetBrains Mono"/>
-                <a:cs typeface="JetBrains Mono"/>
-              </a:rPr>
-              <a:t> </a:t>
-            </a:r>
-            <a:r>
-              <a:rPr sz="1800">
-                <a:solidFill>
                   <a:srgbClr val="C45E00"/>
                 </a:solidFill>
                 <a:latin typeface="JetBrains Mono"/>
                 <a:ea typeface="JetBrains Mono"/>
                 <a:cs typeface="JetBrains Mono"/>
               </a:rPr>
-              <a:t>or</a:t>
+              <a:t> or</a:t>
             </a:r>
             <a:r>
               <a:rPr sz="1800">
@@ -11718,24 +11311,13 @@
             <a:r>
               <a:rPr sz="1800">
                 <a:solidFill>
-                  <a:srgbClr val="080808"/>
-                </a:solidFill>
-                <a:latin typeface="JetBrains Mono"/>
-                <a:ea typeface="JetBrains Mono"/>
-                <a:cs typeface="JetBrains Mono"/>
-              </a:rPr>
-              <a:t> </a:t>
-            </a:r>
-            <a:r>
-              <a:rPr sz="1800">
-                <a:solidFill>
                   <a:srgbClr val="067D17"/>
                 </a:solidFill>
                 <a:latin typeface="JetBrains Mono"/>
                 <a:ea typeface="JetBrains Mono"/>
                 <a:cs typeface="JetBrains Mono"/>
               </a:rPr>
-              <a:t>"yes"</a:t>
+              <a:t> "yes"</a:t>
             </a:r>
             <a:r>
               <a:rPr sz="1800">
@@ -11759,24 +11341,13 @@
             <a:r>
               <a:rPr sz="1800">
                 <a:solidFill>
-                  <a:srgbClr val="080808"/>
-                </a:solidFill>
-                <a:latin typeface="JetBrains Mono"/>
-                <a:ea typeface="JetBrains Mono"/>
-                <a:cs typeface="JetBrains Mono"/>
-              </a:rPr>
-              <a:t>    </a:t>
-            </a:r>
-            <a:r>
-              <a:rPr sz="1800">
-                <a:solidFill>
                   <a:srgbClr val="1750EB"/>
                 </a:solidFill>
                 <a:latin typeface="JetBrains Mono"/>
                 <a:ea typeface="JetBrains Mono"/>
                 <a:cs typeface="JetBrains Mono"/>
               </a:rPr>
-              <a:t>print</a:t>
+              <a:t>    print</a:t>
             </a:r>
             <a:r>
               <a:rPr sz="1800">
@@ -11852,24 +11423,13 @@
             <a:r>
               <a:rPr sz="1800">
                 <a:solidFill>
-                  <a:srgbClr val="080808"/>
-                </a:solidFill>
-                <a:latin typeface="JetBrains Mono"/>
-                <a:ea typeface="JetBrains Mono"/>
-                <a:cs typeface="JetBrains Mono"/>
-              </a:rPr>
-              <a:t>    </a:t>
-            </a:r>
-            <a:r>
-              <a:rPr sz="1800">
-                <a:solidFill>
                   <a:srgbClr val="1750EB"/>
                 </a:solidFill>
                 <a:latin typeface="JetBrains Mono"/>
                 <a:ea typeface="JetBrains Mono"/>
                 <a:cs typeface="JetBrains Mono"/>
               </a:rPr>
-              <a:t>print</a:t>
+              <a:t>    print</a:t>
             </a:r>
             <a:r>
               <a:rPr sz="1800">
